--- a/doitmyself/docs/traffic_law_z_overview.pptx
+++ b/doitmyself/docs/traffic_law_z_overview.pptx
@@ -9,27 +9,32 @@
     <p:sldId id="257" r:id="rId3"/>
     <p:sldId id="258" r:id="rId4"/>
     <p:sldId id="259" r:id="rId5"/>
-    <p:sldId id="260" r:id="rId6"/>
-    <p:sldId id="261" r:id="rId7"/>
-    <p:sldId id="262" r:id="rId8"/>
-    <p:sldId id="263" r:id="rId9"/>
-    <p:sldId id="281" r:id="rId10"/>
-    <p:sldId id="264" r:id="rId11"/>
-    <p:sldId id="265" r:id="rId12"/>
-    <p:sldId id="266" r:id="rId13"/>
-    <p:sldId id="267" r:id="rId14"/>
-    <p:sldId id="268" r:id="rId15"/>
-    <p:sldId id="269" r:id="rId16"/>
-    <p:sldId id="270" r:id="rId17"/>
-    <p:sldId id="271" r:id="rId18"/>
-    <p:sldId id="277" r:id="rId19"/>
-    <p:sldId id="279" r:id="rId20"/>
-    <p:sldId id="272" r:id="rId21"/>
-    <p:sldId id="278" r:id="rId22"/>
-    <p:sldId id="273" r:id="rId23"/>
-    <p:sldId id="280" r:id="rId24"/>
-    <p:sldId id="276" r:id="rId25"/>
-    <p:sldId id="274" r:id="rId26"/>
+    <p:sldId id="282" r:id="rId6"/>
+    <p:sldId id="260" r:id="rId7"/>
+    <p:sldId id="261" r:id="rId8"/>
+    <p:sldId id="262" r:id="rId9"/>
+    <p:sldId id="263" r:id="rId10"/>
+    <p:sldId id="281" r:id="rId11"/>
+    <p:sldId id="264" r:id="rId12"/>
+    <p:sldId id="265" r:id="rId13"/>
+    <p:sldId id="266" r:id="rId14"/>
+    <p:sldId id="267" r:id="rId15"/>
+    <p:sldId id="268" r:id="rId16"/>
+    <p:sldId id="269" r:id="rId17"/>
+    <p:sldId id="270" r:id="rId18"/>
+    <p:sldId id="271" r:id="rId19"/>
+    <p:sldId id="277" r:id="rId20"/>
+    <p:sldId id="279" r:id="rId21"/>
+    <p:sldId id="272" r:id="rId22"/>
+    <p:sldId id="278" r:id="rId23"/>
+    <p:sldId id="273" r:id="rId24"/>
+    <p:sldId id="280" r:id="rId25"/>
+    <p:sldId id="276" r:id="rId26"/>
+    <p:sldId id="274" r:id="rId27"/>
+    <p:sldId id="287" r:id="rId28"/>
+    <p:sldId id="284" r:id="rId29"/>
+    <p:sldId id="285" r:id="rId30"/>
+    <p:sldId id="286" r:id="rId31"/>
   </p:sldIdLst>
   <p:sldSz cx="9144000" cy="6858000" type="screen4x3"/>
   <p:notesSz cx="6858000" cy="9144000"/>
@@ -3365,6 +3370,283 @@
   <p:cSld>
     <p:spTree>
       <p:nvGrpSpPr>
+        <p:cNvPr id="1" name="">
+          <a:extLst>
+            <a:ext uri="{FF2B5EF4-FFF2-40B4-BE49-F238E27FC236}">
+              <a16:creationId xmlns:a16="http://schemas.microsoft.com/office/drawing/2014/main" id="{9576EEA4-EFFE-44F0-46A1-4B8A11BA8675}"/>
+            </a:ext>
+          </a:extLst>
+        </p:cNvPr>
+        <p:cNvGrpSpPr/>
+        <p:nvPr/>
+      </p:nvGrpSpPr>
+      <p:grpSpPr>
+        <a:xfrm>
+          <a:off x="0" y="0"/>
+          <a:ext cx="0" cy="0"/>
+          <a:chOff x="0" y="0"/>
+          <a:chExt cx="0" cy="0"/>
+        </a:xfrm>
+      </p:grpSpPr>
+      <p:sp>
+        <p:nvSpPr>
+          <p:cNvPr id="2" name="Title 1">
+            <a:extLst>
+              <a:ext uri="{FF2B5EF4-FFF2-40B4-BE49-F238E27FC236}">
+                <a16:creationId xmlns:a16="http://schemas.microsoft.com/office/drawing/2014/main" id="{D4D8A8AA-4C74-FA87-DEC2-7399FAFAC5DB}"/>
+              </a:ext>
+            </a:extLst>
+          </p:cNvPr>
+          <p:cNvSpPr>
+            <a:spLocks noGrp="1"/>
+          </p:cNvSpPr>
+          <p:nvPr>
+            <p:ph type="title"/>
+          </p:nvPr>
+        </p:nvSpPr>
+        <p:spPr/>
+        <p:txBody>
+          <a:bodyPr/>
+          <a:lstStyle/>
+          <a:p>
+            <a:pPr>
+              <a:defRPr sz="2800" b="1">
+                <a:solidFill>
+                  <a:srgbClr val="142A4F"/>
+                </a:solidFill>
+              </a:defRPr>
+            </a:pPr>
+            <a:r>
+              <a:t>2-1. LLM 모델 &amp; 프레임워크</a:t>
+            </a:r>
+          </a:p>
+        </p:txBody>
+      </p:sp>
+      <p:sp>
+        <p:nvSpPr>
+          <p:cNvPr id="3" name="Rectangle 2">
+            <a:extLst>
+              <a:ext uri="{FF2B5EF4-FFF2-40B4-BE49-F238E27FC236}">
+                <a16:creationId xmlns:a16="http://schemas.microsoft.com/office/drawing/2014/main" id="{861579AE-BD41-CED5-996D-A1502F1D2197}"/>
+              </a:ext>
+            </a:extLst>
+          </p:cNvPr>
+          <p:cNvSpPr/>
+          <p:nvPr/>
+        </p:nvSpPr>
+        <p:spPr>
+          <a:xfrm>
+            <a:off x="548640" y="1234440"/>
+            <a:ext cx="8229600" cy="45720"/>
+          </a:xfrm>
+          <a:prstGeom prst="rect">
+            <a:avLst/>
+          </a:prstGeom>
+          <a:solidFill>
+            <a:srgbClr val="1F77B4"/>
+          </a:solidFill>
+          <a:ln>
+            <a:noFill/>
+          </a:ln>
+        </p:spPr>
+        <p:style>
+          <a:lnRef idx="1">
+            <a:schemeClr val="accent1"/>
+          </a:lnRef>
+          <a:fillRef idx="3">
+            <a:schemeClr val="accent1"/>
+          </a:fillRef>
+          <a:effectRef idx="2">
+            <a:schemeClr val="accent1"/>
+          </a:effectRef>
+          <a:fontRef idx="minor">
+            <a:schemeClr val="lt1"/>
+          </a:fontRef>
+        </p:style>
+        <p:txBody>
+          <a:bodyPr rtlCol="0" anchor="ctr"/>
+          <a:lstStyle/>
+          <a:p>
+            <a:pPr algn="ctr"/>
+            <a:endParaRPr/>
+          </a:p>
+        </p:txBody>
+      </p:sp>
+      <p:sp>
+        <p:nvSpPr>
+          <p:cNvPr id="4" name="TextBox 3">
+            <a:extLst>
+              <a:ext uri="{FF2B5EF4-FFF2-40B4-BE49-F238E27FC236}">
+                <a16:creationId xmlns:a16="http://schemas.microsoft.com/office/drawing/2014/main" id="{5386EAC1-F33A-5637-974D-81EE055B7271}"/>
+              </a:ext>
+            </a:extLst>
+          </p:cNvPr>
+          <p:cNvSpPr txBox="1"/>
+          <p:nvPr/>
+        </p:nvSpPr>
+        <p:spPr>
+          <a:xfrm>
+            <a:off x="640080" y="1554480"/>
+            <a:ext cx="8138160" cy="423449"/>
+          </a:xfrm>
+          <a:prstGeom prst="rect">
+            <a:avLst/>
+          </a:prstGeom>
+          <a:noFill/>
+        </p:spPr>
+        <p:txBody>
+          <a:bodyPr wrap="square">
+            <a:spAutoFit/>
+          </a:bodyPr>
+          <a:lstStyle/>
+          <a:p>
+            <a:pPr>
+              <a:lnSpc>
+                <a:spcPct val="150000"/>
+              </a:lnSpc>
+              <a:spcAft>
+                <a:spcPts val="600"/>
+              </a:spcAft>
+              <a:defRPr sz="1600">
+                <a:solidFill>
+                  <a:srgbClr val="142A4F"/>
+                </a:solidFill>
+              </a:defRPr>
+            </a:pPr>
+            <a:r>
+              <a:rPr b="1" dirty="0"/>
+              <a:t>• </a:t>
+            </a:r>
+            <a:r>
+              <a:rPr lang="ko-KR" altLang="en-US" b="1" dirty="0"/>
+              <a:t>도로교통법</a:t>
+            </a:r>
+            <a:r>
+              <a:rPr lang="en-US" altLang="ko-KR" b="1" dirty="0"/>
+              <a:t>_</a:t>
+            </a:r>
+            <a:r>
+              <a:rPr lang="ko-KR" altLang="en-US" b="1" dirty="0"/>
+              <a:t>법률</a:t>
+            </a:r>
+            <a:r>
+              <a:rPr lang="en-US" altLang="ko-KR" b="1" dirty="0"/>
+              <a:t>_</a:t>
+            </a:r>
+            <a:r>
+              <a:rPr lang="ko-KR" altLang="en-US" b="1" dirty="0"/>
+              <a:t>제</a:t>
+            </a:r>
+            <a:r>
+              <a:rPr lang="en-US" altLang="ko-KR" b="1" dirty="0"/>
+              <a:t>21246</a:t>
+            </a:r>
+            <a:r>
+              <a:rPr lang="ko-KR" altLang="en-US" b="1" dirty="0"/>
+              <a:t>호</a:t>
+            </a:r>
+            <a:r>
+              <a:rPr lang="en-US" altLang="ko-KR" b="1" dirty="0"/>
+              <a:t>.pdf</a:t>
+            </a:r>
+            <a:r>
+              <a:rPr lang="ko-KR" altLang="en-US" b="1" dirty="0"/>
+              <a:t> </a:t>
+            </a:r>
+            <a:r>
+              <a:rPr lang="en-US" altLang="ko-KR" b="1" dirty="0"/>
+              <a:t>/ </a:t>
+            </a:r>
+            <a:r>
+              <a:rPr lang="ko-KR" altLang="en-US" b="1" dirty="0"/>
+              <a:t>판례목록</a:t>
+            </a:r>
+            <a:r>
+              <a:rPr lang="en-US" altLang="ko-KR" b="1" dirty="0"/>
+              <a:t>.csv</a:t>
+            </a:r>
+            <a:endParaRPr b="1" dirty="0"/>
+          </a:p>
+        </p:txBody>
+      </p:sp>
+      <p:pic>
+        <p:nvPicPr>
+          <p:cNvPr id="6" name="그림 5">
+            <a:extLst>
+              <a:ext uri="{FF2B5EF4-FFF2-40B4-BE49-F238E27FC236}">
+                <a16:creationId xmlns:a16="http://schemas.microsoft.com/office/drawing/2014/main" id="{E36C1A9E-F5C8-CACB-648D-B5F6BFEF8A24}"/>
+              </a:ext>
+            </a:extLst>
+          </p:cNvPr>
+          <p:cNvPicPr>
+            <a:picLocks noChangeAspect="1"/>
+          </p:cNvPicPr>
+          <p:nvPr/>
+        </p:nvPicPr>
+        <p:blipFill>
+          <a:blip r:embed="rId2"/>
+          <a:stretch>
+            <a:fillRect/>
+          </a:stretch>
+        </p:blipFill>
+        <p:spPr>
+          <a:xfrm>
+            <a:off x="217696" y="2252249"/>
+            <a:ext cx="4527741" cy="3812551"/>
+          </a:xfrm>
+          <a:prstGeom prst="rect">
+            <a:avLst/>
+          </a:prstGeom>
+        </p:spPr>
+      </p:pic>
+      <p:pic>
+        <p:nvPicPr>
+          <p:cNvPr id="8" name="그림 7">
+            <a:extLst>
+              <a:ext uri="{FF2B5EF4-FFF2-40B4-BE49-F238E27FC236}">
+                <a16:creationId xmlns:a16="http://schemas.microsoft.com/office/drawing/2014/main" id="{9AD8F78D-802F-BD09-588D-09909EA4A930}"/>
+              </a:ext>
+            </a:extLst>
+          </p:cNvPr>
+          <p:cNvPicPr>
+            <a:picLocks noChangeAspect="1"/>
+          </p:cNvPicPr>
+          <p:nvPr/>
+        </p:nvPicPr>
+        <p:blipFill>
+          <a:blip r:embed="rId3"/>
+          <a:stretch>
+            <a:fillRect/>
+          </a:stretch>
+        </p:blipFill>
+        <p:spPr>
+          <a:xfrm>
+            <a:off x="4918407" y="2384401"/>
+            <a:ext cx="4016851" cy="3871161"/>
+          </a:xfrm>
+          <a:prstGeom prst="rect">
+            <a:avLst/>
+          </a:prstGeom>
+        </p:spPr>
+      </p:pic>
+    </p:spTree>
+    <p:extLst>
+      <p:ext uri="{BB962C8B-B14F-4D97-AF65-F5344CB8AC3E}">
+        <p14:creationId xmlns:p14="http://schemas.microsoft.com/office/powerpoint/2010/main" val="2777759217"/>
+      </p:ext>
+    </p:extLst>
+  </p:cSld>
+  <p:clrMapOvr>
+    <a:masterClrMapping/>
+  </p:clrMapOvr>
+</p:sld>
+</file>
+
+<file path=ppt/slides/slide11.xml><?xml version="1.0" encoding="utf-8"?>
+<p:sld xmlns:a="http://schemas.openxmlformats.org/drawingml/2006/main" xmlns:r="http://schemas.openxmlformats.org/officeDocument/2006/relationships" xmlns:p="http://schemas.openxmlformats.org/presentationml/2006/main">
+  <p:cSld>
+    <p:spTree>
+      <p:nvGrpSpPr>
         <p:cNvPr id="1" name=""/>
         <p:cNvGrpSpPr/>
         <p:nvPr/>
@@ -3995,696 +4277,6 @@
               <a:t>생성</a:t>
             </a:r>
             <a:endParaRPr b="1" dirty="0"/>
-          </a:p>
-        </p:txBody>
-      </p:sp>
-    </p:spTree>
-  </p:cSld>
-  <p:clrMapOvr>
-    <a:masterClrMapping/>
-  </p:clrMapOvr>
-</p:sld>
-</file>
-
-<file path=ppt/slides/slide11.xml><?xml version="1.0" encoding="utf-8"?>
-<p:sld xmlns:a="http://schemas.openxmlformats.org/drawingml/2006/main" xmlns:r="http://schemas.openxmlformats.org/officeDocument/2006/relationships" xmlns:p="http://schemas.openxmlformats.org/presentationml/2006/main">
-  <p:cSld>
-    <p:spTree>
-      <p:nvGrpSpPr>
-        <p:cNvPr id="1" name=""/>
-        <p:cNvGrpSpPr/>
-        <p:nvPr/>
-      </p:nvGrpSpPr>
-      <p:grpSpPr>
-        <a:xfrm>
-          <a:off x="0" y="0"/>
-          <a:ext cx="0" cy="0"/>
-          <a:chOff x="0" y="0"/>
-          <a:chExt cx="0" cy="0"/>
-        </a:xfrm>
-      </p:grpSpPr>
-      <p:sp>
-        <p:nvSpPr>
-          <p:cNvPr id="2" name="Title 1"/>
-          <p:cNvSpPr>
-            <a:spLocks noGrp="1"/>
-          </p:cNvSpPr>
-          <p:nvPr>
-            <p:ph type="title"/>
-          </p:nvPr>
-        </p:nvSpPr>
-        <p:spPr/>
-        <p:txBody>
-          <a:bodyPr/>
-          <a:lstStyle/>
-          <a:p>
-            <a:pPr>
-              <a:defRPr sz="2800" b="1">
-                <a:solidFill>
-                  <a:srgbClr val="142A4F"/>
-                </a:solidFill>
-              </a:defRPr>
-            </a:pPr>
-            <a:r>
-              <a:t>2-3. 전략 (Chunking · Retriever 고도화)</a:t>
-            </a:r>
-          </a:p>
-        </p:txBody>
-      </p:sp>
-      <p:sp>
-        <p:nvSpPr>
-          <p:cNvPr id="3" name="Rectangle 2"/>
-          <p:cNvSpPr/>
-          <p:nvPr/>
-        </p:nvSpPr>
-        <p:spPr>
-          <a:xfrm>
-            <a:off x="548640" y="1234440"/>
-            <a:ext cx="8229600" cy="45720"/>
-          </a:xfrm>
-          <a:prstGeom prst="rect">
-            <a:avLst/>
-          </a:prstGeom>
-          <a:solidFill>
-            <a:srgbClr val="1F77B4"/>
-          </a:solidFill>
-          <a:ln>
-            <a:noFill/>
-          </a:ln>
-        </p:spPr>
-        <p:style>
-          <a:lnRef idx="1">
-            <a:schemeClr val="accent1"/>
-          </a:lnRef>
-          <a:fillRef idx="3">
-            <a:schemeClr val="accent1"/>
-          </a:fillRef>
-          <a:effectRef idx="2">
-            <a:schemeClr val="accent1"/>
-          </a:effectRef>
-          <a:fontRef idx="minor">
-            <a:schemeClr val="lt1"/>
-          </a:fontRef>
-        </p:style>
-        <p:txBody>
-          <a:bodyPr rtlCol="0" anchor="ctr"/>
-          <a:lstStyle/>
-          <a:p>
-            <a:pPr algn="ctr"/>
-            <a:endParaRPr/>
-          </a:p>
-        </p:txBody>
-      </p:sp>
-      <p:sp>
-        <p:nvSpPr>
-          <p:cNvPr id="4" name="TextBox 3"/>
-          <p:cNvSpPr txBox="1"/>
-          <p:nvPr/>
-        </p:nvSpPr>
-        <p:spPr>
-          <a:xfrm>
-            <a:off x="640080" y="1554480"/>
-            <a:ext cx="8138160" cy="4645567"/>
-          </a:xfrm>
-          <a:prstGeom prst="rect">
-            <a:avLst/>
-          </a:prstGeom>
-          <a:noFill/>
-        </p:spPr>
-        <p:txBody>
-          <a:bodyPr wrap="square">
-            <a:spAutoFit/>
-          </a:bodyPr>
-          <a:lstStyle/>
-          <a:p>
-            <a:pPr>
-              <a:lnSpc>
-                <a:spcPct val="150000"/>
-              </a:lnSpc>
-              <a:spcAft>
-                <a:spcPts val="600"/>
-              </a:spcAft>
-              <a:defRPr sz="1500">
-                <a:solidFill>
-                  <a:srgbClr val="142A4F"/>
-                </a:solidFill>
-              </a:defRPr>
-            </a:pPr>
-            <a:r>
-              <a:rPr b="1" dirty="0"/>
-              <a:t>• Chunking</a:t>
-            </a:r>
-          </a:p>
-          <a:p>
-            <a:pPr>
-              <a:lnSpc>
-                <a:spcPct val="150000"/>
-              </a:lnSpc>
-              <a:spcAft>
-                <a:spcPts val="600"/>
-              </a:spcAft>
-              <a:defRPr sz="1300">
-                <a:solidFill>
-                  <a:srgbClr val="444444"/>
-                </a:solidFill>
-              </a:defRPr>
-            </a:pPr>
-            <a:r>
-              <a:rPr dirty="0"/>
-              <a:t>    </a:t>
-            </a:r>
-            <a:r>
-              <a:rPr dirty="0" err="1"/>
-              <a:t>법령</a:t>
-            </a:r>
-            <a:r>
-              <a:rPr dirty="0"/>
-              <a:t>: </a:t>
-            </a:r>
-            <a:r>
-              <a:rPr dirty="0" err="1"/>
-              <a:t>페이지</a:t>
-            </a:r>
-            <a:r>
-              <a:rPr dirty="0"/>
-              <a:t> </a:t>
-            </a:r>
-            <a:r>
-              <a:rPr dirty="0" err="1"/>
-              <a:t>단위</a:t>
-            </a:r>
-            <a:r>
-              <a:rPr dirty="0"/>
-              <a:t> </a:t>
-            </a:r>
-            <a:r>
-              <a:rPr dirty="0" err="1"/>
-              <a:t>정제</a:t>
-            </a:r>
-            <a:r>
-              <a:rPr dirty="0"/>
-              <a:t> 후 </a:t>
-            </a:r>
-            <a:r>
-              <a:rPr dirty="0" err="1"/>
-              <a:t>문장</a:t>
-            </a:r>
-            <a:r>
-              <a:rPr dirty="0"/>
-              <a:t> </a:t>
-            </a:r>
-            <a:r>
-              <a:rPr dirty="0" err="1"/>
-              <a:t>경계</a:t>
-            </a:r>
-            <a:r>
-              <a:rPr dirty="0"/>
-              <a:t> </a:t>
-            </a:r>
-            <a:r>
-              <a:rPr dirty="0" err="1"/>
-              <a:t>우선</a:t>
-            </a:r>
-            <a:r>
-              <a:rPr dirty="0"/>
-              <a:t> </a:t>
-            </a:r>
-            <a:r>
-              <a:rPr dirty="0" err="1"/>
-              <a:t>분할</a:t>
-            </a:r>
-            <a:r>
-              <a:rPr dirty="0"/>
-              <a:t>(≈1100자, overlap 160)</a:t>
-            </a:r>
-          </a:p>
-          <a:p>
-            <a:pPr>
-              <a:lnSpc>
-                <a:spcPct val="150000"/>
-              </a:lnSpc>
-              <a:spcAft>
-                <a:spcPts val="600"/>
-              </a:spcAft>
-              <a:defRPr sz="1300">
-                <a:solidFill>
-                  <a:srgbClr val="444444"/>
-                </a:solidFill>
-              </a:defRPr>
-            </a:pPr>
-            <a:r>
-              <a:rPr dirty="0"/>
-              <a:t>    </a:t>
-            </a:r>
-            <a:r>
-              <a:rPr dirty="0" err="1"/>
-              <a:t>조문</a:t>
-            </a:r>
-            <a:r>
-              <a:rPr dirty="0"/>
-              <a:t> </a:t>
-            </a:r>
-            <a:r>
-              <a:rPr dirty="0" err="1"/>
-              <a:t>번호</a:t>
-            </a:r>
-            <a:r>
-              <a:rPr dirty="0"/>
-              <a:t>(</a:t>
-            </a:r>
-            <a:r>
-              <a:rPr dirty="0" err="1"/>
-              <a:t>제N조</a:t>
-            </a:r>
-            <a:r>
-              <a:rPr dirty="0"/>
-              <a:t>/</a:t>
-            </a:r>
-            <a:r>
-              <a:rPr dirty="0" err="1"/>
-              <a:t>제N조의M</a:t>
-            </a:r>
-            <a:r>
-              <a:rPr dirty="0"/>
-              <a:t>) </a:t>
-            </a:r>
-            <a:r>
-              <a:rPr dirty="0" err="1"/>
-              <a:t>메타데이터</a:t>
-            </a:r>
-            <a:r>
-              <a:rPr dirty="0"/>
-              <a:t> </a:t>
-            </a:r>
-            <a:r>
-              <a:rPr dirty="0" err="1"/>
-              <a:t>자동</a:t>
-            </a:r>
-            <a:r>
-              <a:rPr dirty="0"/>
-              <a:t> </a:t>
-            </a:r>
-            <a:r>
-              <a:rPr dirty="0" err="1"/>
-              <a:t>태깅</a:t>
-            </a:r>
-            <a:r>
-              <a:rPr dirty="0"/>
-              <a:t> → </a:t>
-            </a:r>
-            <a:r>
-              <a:rPr dirty="0" err="1"/>
-              <a:t>출처</a:t>
-            </a:r>
-            <a:r>
-              <a:rPr dirty="0"/>
-              <a:t> </a:t>
-            </a:r>
-            <a:r>
-              <a:rPr dirty="0" err="1"/>
-              <a:t>추적</a:t>
-            </a:r>
-            <a:endParaRPr dirty="0"/>
-          </a:p>
-          <a:p>
-            <a:pPr>
-              <a:lnSpc>
-                <a:spcPct val="150000"/>
-              </a:lnSpc>
-              <a:spcAft>
-                <a:spcPts val="600"/>
-              </a:spcAft>
-              <a:defRPr sz="1300">
-                <a:solidFill>
-                  <a:srgbClr val="444444"/>
-                </a:solidFill>
-              </a:defRPr>
-            </a:pPr>
-            <a:r>
-              <a:rPr dirty="0"/>
-              <a:t>    </a:t>
-            </a:r>
-            <a:r>
-              <a:rPr dirty="0" err="1"/>
-              <a:t>판례</a:t>
-            </a:r>
-            <a:r>
-              <a:rPr dirty="0"/>
-              <a:t>: 1건=1문서(</a:t>
-            </a:r>
-            <a:r>
-              <a:rPr dirty="0" err="1"/>
-              <a:t>사건명·번호·선고일·조문·판시사항</a:t>
-            </a:r>
-            <a:r>
-              <a:rPr dirty="0"/>
-              <a:t> </a:t>
-            </a:r>
-            <a:r>
-              <a:rPr dirty="0" err="1"/>
-              <a:t>구조화</a:t>
-            </a:r>
-            <a:r>
-              <a:rPr dirty="0"/>
-              <a:t>)</a:t>
-            </a:r>
-            <a:endParaRPr lang="en-US" dirty="0"/>
-          </a:p>
-          <a:p>
-            <a:pPr>
-              <a:lnSpc>
-                <a:spcPct val="150000"/>
-              </a:lnSpc>
-              <a:spcAft>
-                <a:spcPts val="600"/>
-              </a:spcAft>
-              <a:defRPr sz="1300">
-                <a:solidFill>
-                  <a:srgbClr val="444444"/>
-                </a:solidFill>
-              </a:defRPr>
-            </a:pPr>
-            <a:endParaRPr dirty="0"/>
-          </a:p>
-          <a:p>
-            <a:pPr>
-              <a:lnSpc>
-                <a:spcPct val="150000"/>
-              </a:lnSpc>
-              <a:spcAft>
-                <a:spcPts val="600"/>
-              </a:spcAft>
-              <a:defRPr sz="1500">
-                <a:solidFill>
-                  <a:srgbClr val="142A4F"/>
-                </a:solidFill>
-              </a:defRPr>
-            </a:pPr>
-            <a:r>
-              <a:rPr b="1" dirty="0"/>
-              <a:t>• Retriever </a:t>
-            </a:r>
-            <a:r>
-              <a:rPr b="1" dirty="0" err="1"/>
-              <a:t>고도화</a:t>
-            </a:r>
-            <a:endParaRPr b="1" dirty="0"/>
-          </a:p>
-          <a:p>
-            <a:pPr>
-              <a:lnSpc>
-                <a:spcPct val="150000"/>
-              </a:lnSpc>
-              <a:spcAft>
-                <a:spcPts val="600"/>
-              </a:spcAft>
-              <a:defRPr sz="1300">
-                <a:solidFill>
-                  <a:srgbClr val="444444"/>
-                </a:solidFill>
-              </a:defRPr>
-            </a:pPr>
-            <a:r>
-              <a:rPr dirty="0"/>
-              <a:t>    </a:t>
-            </a:r>
-            <a:r>
-              <a:rPr dirty="0" err="1"/>
-              <a:t>벡터</a:t>
-            </a:r>
-            <a:r>
-              <a:rPr dirty="0"/>
-              <a:t> + BM25 </a:t>
-            </a:r>
-            <a:r>
-              <a:rPr dirty="0" err="1"/>
-              <a:t>하이브리드</a:t>
-            </a:r>
-            <a:r>
-              <a:rPr dirty="0"/>
-              <a:t> → RRF </a:t>
-            </a:r>
-            <a:r>
-              <a:rPr dirty="0" err="1"/>
-              <a:t>순위</a:t>
-            </a:r>
-            <a:r>
-              <a:rPr dirty="0"/>
-              <a:t> </a:t>
-            </a:r>
-            <a:r>
-              <a:rPr dirty="0" err="1"/>
-              <a:t>융합</a:t>
-            </a:r>
-            <a:endParaRPr dirty="0"/>
-          </a:p>
-          <a:p>
-            <a:pPr>
-              <a:lnSpc>
-                <a:spcPct val="150000"/>
-              </a:lnSpc>
-              <a:spcAft>
-                <a:spcPts val="600"/>
-              </a:spcAft>
-              <a:defRPr sz="1300">
-                <a:solidFill>
-                  <a:srgbClr val="444444"/>
-                </a:solidFill>
-              </a:defRPr>
-            </a:pPr>
-            <a:r>
-              <a:rPr dirty="0"/>
-              <a:t>    </a:t>
-            </a:r>
-            <a:r>
-              <a:rPr dirty="0" err="1"/>
-              <a:t>다중</a:t>
-            </a:r>
-            <a:r>
-              <a:rPr dirty="0"/>
-              <a:t> </a:t>
-            </a:r>
-            <a:r>
-              <a:rPr dirty="0" err="1"/>
-              <a:t>쿼리</a:t>
-            </a:r>
-            <a:r>
-              <a:rPr dirty="0"/>
-              <a:t>: </a:t>
-            </a:r>
-            <a:r>
-              <a:rPr dirty="0" err="1"/>
-              <a:t>분석</a:t>
-            </a:r>
-            <a:r>
-              <a:rPr dirty="0"/>
-              <a:t> </a:t>
-            </a:r>
-            <a:r>
-              <a:rPr dirty="0" err="1"/>
-              <a:t>단계의</a:t>
-            </a:r>
-            <a:r>
-              <a:rPr dirty="0"/>
-              <a:t> </a:t>
-            </a:r>
-            <a:r>
-              <a:rPr dirty="0" err="1"/>
-              <a:t>search_queries</a:t>
-            </a:r>
-            <a:r>
-              <a:rPr dirty="0"/>
-              <a:t> + </a:t>
-            </a:r>
-            <a:r>
-              <a:rPr dirty="0" err="1"/>
-              <a:t>조문</a:t>
-            </a:r>
-            <a:r>
-              <a:rPr dirty="0"/>
-              <a:t> </a:t>
-            </a:r>
-            <a:r>
-              <a:rPr dirty="0" err="1"/>
-              <a:t>후보로</a:t>
-            </a:r>
-            <a:r>
-              <a:rPr dirty="0"/>
-              <a:t> </a:t>
-            </a:r>
-            <a:r>
-              <a:rPr dirty="0" err="1"/>
-              <a:t>재검색</a:t>
-            </a:r>
-            <a:endParaRPr dirty="0"/>
-          </a:p>
-          <a:p>
-            <a:pPr>
-              <a:lnSpc>
-                <a:spcPct val="150000"/>
-              </a:lnSpc>
-              <a:spcAft>
-                <a:spcPts val="600"/>
-              </a:spcAft>
-              <a:defRPr sz="1300">
-                <a:solidFill>
-                  <a:srgbClr val="444444"/>
-                </a:solidFill>
-              </a:defRPr>
-            </a:pPr>
-            <a:r>
-              <a:rPr dirty="0"/>
-              <a:t>    법령7 / 판례5건 </a:t>
-            </a:r>
-            <a:r>
-              <a:rPr dirty="0" err="1"/>
-              <a:t>수집</a:t>
-            </a:r>
-            <a:r>
-              <a:rPr dirty="0"/>
-              <a:t> 후 </a:t>
-            </a:r>
-            <a:r>
-              <a:rPr dirty="0" err="1"/>
-              <a:t>중복</a:t>
-            </a:r>
-            <a:r>
-              <a:rPr dirty="0"/>
-              <a:t> </a:t>
-            </a:r>
-            <a:r>
-              <a:rPr dirty="0" err="1"/>
-              <a:t>제거</a:t>
-            </a:r>
-            <a:endParaRPr lang="en-US" dirty="0"/>
-          </a:p>
-          <a:p>
-            <a:pPr>
-              <a:lnSpc>
-                <a:spcPct val="150000"/>
-              </a:lnSpc>
-              <a:spcAft>
-                <a:spcPts val="600"/>
-              </a:spcAft>
-              <a:defRPr sz="1300">
-                <a:solidFill>
-                  <a:srgbClr val="444444"/>
-                </a:solidFill>
-              </a:defRPr>
-            </a:pPr>
-            <a:endParaRPr dirty="0"/>
-          </a:p>
-          <a:p>
-            <a:pPr>
-              <a:lnSpc>
-                <a:spcPct val="150000"/>
-              </a:lnSpc>
-              <a:spcAft>
-                <a:spcPts val="600"/>
-              </a:spcAft>
-              <a:defRPr sz="1500">
-                <a:solidFill>
-                  <a:srgbClr val="142A4F"/>
-                </a:solidFill>
-              </a:defRPr>
-            </a:pPr>
-            <a:r>
-              <a:rPr b="1" dirty="0"/>
-              <a:t>• </a:t>
-            </a:r>
-            <a:r>
-              <a:rPr b="1" dirty="0" err="1"/>
-              <a:t>운영</a:t>
-            </a:r>
-            <a:r>
-              <a:rPr b="1" dirty="0"/>
-              <a:t> </a:t>
-            </a:r>
-            <a:r>
-              <a:rPr b="1" dirty="0" err="1"/>
-              <a:t>전략</a:t>
-            </a:r>
-            <a:endParaRPr b="1" dirty="0"/>
-          </a:p>
-          <a:p>
-            <a:pPr>
-              <a:lnSpc>
-                <a:spcPct val="150000"/>
-              </a:lnSpc>
-              <a:spcAft>
-                <a:spcPts val="600"/>
-              </a:spcAft>
-              <a:defRPr sz="1300">
-                <a:solidFill>
-                  <a:srgbClr val="444444"/>
-                </a:solidFill>
-              </a:defRPr>
-            </a:pPr>
-            <a:r>
-              <a:rPr dirty="0"/>
-              <a:t>    </a:t>
-            </a:r>
-            <a:r>
-              <a:rPr dirty="0" err="1"/>
-              <a:t>데이터</a:t>
-            </a:r>
-            <a:r>
-              <a:rPr dirty="0"/>
-              <a:t> </a:t>
-            </a:r>
-            <a:r>
-              <a:rPr dirty="0" err="1"/>
-              <a:t>지문</a:t>
-            </a:r>
-            <a:r>
-              <a:rPr dirty="0"/>
-              <a:t>(fingerprint) </a:t>
-            </a:r>
-            <a:r>
-              <a:rPr dirty="0" err="1"/>
-              <a:t>기반</a:t>
-            </a:r>
-            <a:r>
-              <a:rPr dirty="0"/>
-              <a:t> </a:t>
-            </a:r>
-            <a:r>
-              <a:rPr dirty="0" err="1"/>
-              <a:t>컬렉션</a:t>
-            </a:r>
-            <a:r>
-              <a:rPr dirty="0"/>
-              <a:t> </a:t>
-            </a:r>
-            <a:r>
-              <a:rPr dirty="0" err="1"/>
-              <a:t>캐싱</a:t>
-            </a:r>
-            <a:r>
-              <a:rPr dirty="0"/>
-              <a:t> → </a:t>
-            </a:r>
-            <a:r>
-              <a:rPr dirty="0" err="1"/>
-              <a:t>중복</a:t>
-            </a:r>
-            <a:r>
-              <a:rPr dirty="0"/>
-              <a:t> </a:t>
-            </a:r>
-            <a:r>
-              <a:rPr dirty="0" err="1"/>
-              <a:t>임베딩</a:t>
-            </a:r>
-            <a:r>
-              <a:rPr dirty="0"/>
-              <a:t> </a:t>
-            </a:r>
-            <a:r>
-              <a:rPr dirty="0" err="1"/>
-              <a:t>방지</a:t>
-            </a:r>
-            <a:endParaRPr dirty="0"/>
           </a:p>
         </p:txBody>
       </p:sp>
@@ -4736,7 +4328,7 @@
               </a:defRPr>
             </a:pPr>
             <a:r>
-              <a:t>2-4. 프롬프트 엔지니어링</a:t>
+              <a:t>2-3. 전략 (Chunking · Retriever 고도화)</a:t>
             </a:r>
           </a:p>
         </p:txBody>
@@ -4794,6 +4386,740 @@
         <p:spPr>
           <a:xfrm>
             <a:off x="640080" y="1554480"/>
+            <a:ext cx="8138160" cy="4645567"/>
+          </a:xfrm>
+          <a:prstGeom prst="rect">
+            <a:avLst/>
+          </a:prstGeom>
+          <a:noFill/>
+        </p:spPr>
+        <p:txBody>
+          <a:bodyPr wrap="square">
+            <a:spAutoFit/>
+          </a:bodyPr>
+          <a:lstStyle/>
+          <a:p>
+            <a:pPr>
+              <a:lnSpc>
+                <a:spcPct val="150000"/>
+              </a:lnSpc>
+              <a:spcAft>
+                <a:spcPts val="600"/>
+              </a:spcAft>
+              <a:defRPr sz="1500">
+                <a:solidFill>
+                  <a:srgbClr val="142A4F"/>
+                </a:solidFill>
+              </a:defRPr>
+            </a:pPr>
+            <a:r>
+              <a:rPr b="1" dirty="0"/>
+              <a:t>• Chunking</a:t>
+            </a:r>
+          </a:p>
+          <a:p>
+            <a:pPr>
+              <a:lnSpc>
+                <a:spcPct val="150000"/>
+              </a:lnSpc>
+              <a:spcAft>
+                <a:spcPts val="600"/>
+              </a:spcAft>
+              <a:defRPr sz="1300">
+                <a:solidFill>
+                  <a:srgbClr val="444444"/>
+                </a:solidFill>
+              </a:defRPr>
+            </a:pPr>
+            <a:r>
+              <a:rPr dirty="0"/>
+              <a:t>    </a:t>
+            </a:r>
+            <a:r>
+              <a:rPr lang="en-US" altLang="ko-KR" dirty="0"/>
+              <a:t>-. </a:t>
+            </a:r>
+            <a:r>
+              <a:rPr dirty="0" err="1"/>
+              <a:t>법령</a:t>
+            </a:r>
+            <a:r>
+              <a:rPr lang="en-US" dirty="0"/>
+              <a:t> </a:t>
+            </a:r>
+            <a:r>
+              <a:rPr dirty="0"/>
+              <a:t>: </a:t>
+            </a:r>
+            <a:r>
+              <a:rPr dirty="0" err="1"/>
+              <a:t>페이지</a:t>
+            </a:r>
+            <a:r>
+              <a:rPr dirty="0"/>
+              <a:t> </a:t>
+            </a:r>
+            <a:r>
+              <a:rPr dirty="0" err="1"/>
+              <a:t>단위</a:t>
+            </a:r>
+            <a:r>
+              <a:rPr dirty="0"/>
+              <a:t> </a:t>
+            </a:r>
+            <a:r>
+              <a:rPr dirty="0" err="1"/>
+              <a:t>정제</a:t>
+            </a:r>
+            <a:r>
+              <a:rPr dirty="0"/>
+              <a:t> 후 </a:t>
+            </a:r>
+            <a:r>
+              <a:rPr dirty="0" err="1"/>
+              <a:t>문장</a:t>
+            </a:r>
+            <a:r>
+              <a:rPr dirty="0"/>
+              <a:t> </a:t>
+            </a:r>
+            <a:r>
+              <a:rPr dirty="0" err="1"/>
+              <a:t>경계</a:t>
+            </a:r>
+            <a:r>
+              <a:rPr dirty="0"/>
+              <a:t> </a:t>
+            </a:r>
+            <a:r>
+              <a:rPr dirty="0" err="1"/>
+              <a:t>우선</a:t>
+            </a:r>
+            <a:r>
+              <a:rPr dirty="0"/>
+              <a:t> </a:t>
+            </a:r>
+            <a:r>
+              <a:rPr dirty="0" err="1"/>
+              <a:t>분할</a:t>
+            </a:r>
+            <a:r>
+              <a:rPr lang="en-US" dirty="0"/>
+              <a:t> </a:t>
+            </a:r>
+            <a:r>
+              <a:rPr dirty="0"/>
+              <a:t>(≈1100자, overlap 160)</a:t>
+            </a:r>
+          </a:p>
+          <a:p>
+            <a:pPr>
+              <a:lnSpc>
+                <a:spcPct val="150000"/>
+              </a:lnSpc>
+              <a:spcAft>
+                <a:spcPts val="600"/>
+              </a:spcAft>
+              <a:defRPr sz="1300">
+                <a:solidFill>
+                  <a:srgbClr val="444444"/>
+                </a:solidFill>
+              </a:defRPr>
+            </a:pPr>
+            <a:r>
+              <a:rPr dirty="0"/>
+              <a:t>    </a:t>
+            </a:r>
+            <a:r>
+              <a:rPr lang="en-US" altLang="ko-KR" dirty="0"/>
+              <a:t>-. </a:t>
+            </a:r>
+            <a:r>
+              <a:rPr dirty="0" err="1"/>
+              <a:t>조문</a:t>
+            </a:r>
+            <a:r>
+              <a:rPr dirty="0"/>
+              <a:t> </a:t>
+            </a:r>
+            <a:r>
+              <a:rPr dirty="0" err="1"/>
+              <a:t>번호</a:t>
+            </a:r>
+            <a:r>
+              <a:rPr dirty="0"/>
+              <a:t>(</a:t>
+            </a:r>
+            <a:r>
+              <a:rPr dirty="0" err="1"/>
+              <a:t>제N조</a:t>
+            </a:r>
+            <a:r>
+              <a:rPr dirty="0"/>
+              <a:t>/</a:t>
+            </a:r>
+            <a:r>
+              <a:rPr dirty="0" err="1"/>
+              <a:t>제N조의M</a:t>
+            </a:r>
+            <a:r>
+              <a:rPr dirty="0"/>
+              <a:t>) </a:t>
+            </a:r>
+            <a:r>
+              <a:rPr dirty="0" err="1"/>
+              <a:t>메타데이터</a:t>
+            </a:r>
+            <a:r>
+              <a:rPr dirty="0"/>
+              <a:t> </a:t>
+            </a:r>
+            <a:r>
+              <a:rPr dirty="0" err="1"/>
+              <a:t>자동</a:t>
+            </a:r>
+            <a:r>
+              <a:rPr dirty="0"/>
+              <a:t> </a:t>
+            </a:r>
+            <a:r>
+              <a:rPr dirty="0" err="1"/>
+              <a:t>태깅</a:t>
+            </a:r>
+            <a:r>
+              <a:rPr dirty="0"/>
+              <a:t> → </a:t>
+            </a:r>
+            <a:r>
+              <a:rPr dirty="0" err="1"/>
+              <a:t>출처</a:t>
+            </a:r>
+            <a:r>
+              <a:rPr dirty="0"/>
+              <a:t> </a:t>
+            </a:r>
+            <a:r>
+              <a:rPr dirty="0" err="1"/>
+              <a:t>추적</a:t>
+            </a:r>
+            <a:endParaRPr dirty="0"/>
+          </a:p>
+          <a:p>
+            <a:pPr>
+              <a:lnSpc>
+                <a:spcPct val="150000"/>
+              </a:lnSpc>
+              <a:spcAft>
+                <a:spcPts val="600"/>
+              </a:spcAft>
+              <a:defRPr sz="1300">
+                <a:solidFill>
+                  <a:srgbClr val="444444"/>
+                </a:solidFill>
+              </a:defRPr>
+            </a:pPr>
+            <a:r>
+              <a:rPr dirty="0"/>
+              <a:t>    </a:t>
+            </a:r>
+            <a:r>
+              <a:rPr lang="en-US" altLang="ko-KR" dirty="0"/>
+              <a:t>-. </a:t>
+            </a:r>
+            <a:r>
+              <a:rPr dirty="0" err="1"/>
+              <a:t>판례</a:t>
+            </a:r>
+            <a:r>
+              <a:rPr lang="en-US" dirty="0"/>
+              <a:t> </a:t>
+            </a:r>
+            <a:r>
+              <a:rPr dirty="0"/>
+              <a:t>: 1건=1문서(</a:t>
+            </a:r>
+            <a:r>
+              <a:rPr dirty="0" err="1"/>
+              <a:t>사건명·번호·선고일·조문·판시사항</a:t>
+            </a:r>
+            <a:r>
+              <a:rPr dirty="0"/>
+              <a:t> </a:t>
+            </a:r>
+            <a:r>
+              <a:rPr dirty="0" err="1"/>
+              <a:t>구조화</a:t>
+            </a:r>
+            <a:r>
+              <a:rPr dirty="0"/>
+              <a:t>)</a:t>
+            </a:r>
+            <a:endParaRPr lang="en-US" dirty="0"/>
+          </a:p>
+          <a:p>
+            <a:pPr>
+              <a:lnSpc>
+                <a:spcPct val="150000"/>
+              </a:lnSpc>
+              <a:spcAft>
+                <a:spcPts val="600"/>
+              </a:spcAft>
+              <a:defRPr sz="1300">
+                <a:solidFill>
+                  <a:srgbClr val="444444"/>
+                </a:solidFill>
+              </a:defRPr>
+            </a:pPr>
+            <a:endParaRPr dirty="0"/>
+          </a:p>
+          <a:p>
+            <a:pPr>
+              <a:lnSpc>
+                <a:spcPct val="150000"/>
+              </a:lnSpc>
+              <a:spcAft>
+                <a:spcPts val="600"/>
+              </a:spcAft>
+              <a:defRPr sz="1500">
+                <a:solidFill>
+                  <a:srgbClr val="142A4F"/>
+                </a:solidFill>
+              </a:defRPr>
+            </a:pPr>
+            <a:r>
+              <a:rPr b="1" dirty="0"/>
+              <a:t>• Retriever </a:t>
+            </a:r>
+            <a:r>
+              <a:rPr b="1" dirty="0" err="1"/>
+              <a:t>고도화</a:t>
+            </a:r>
+            <a:endParaRPr b="1" dirty="0"/>
+          </a:p>
+          <a:p>
+            <a:pPr>
+              <a:lnSpc>
+                <a:spcPct val="150000"/>
+              </a:lnSpc>
+              <a:spcAft>
+                <a:spcPts val="600"/>
+              </a:spcAft>
+              <a:defRPr sz="1300">
+                <a:solidFill>
+                  <a:srgbClr val="444444"/>
+                </a:solidFill>
+              </a:defRPr>
+            </a:pPr>
+            <a:r>
+              <a:rPr dirty="0"/>
+              <a:t>    </a:t>
+            </a:r>
+            <a:r>
+              <a:rPr lang="en-US" altLang="ko-KR" dirty="0"/>
+              <a:t>-. </a:t>
+            </a:r>
+            <a:r>
+              <a:rPr dirty="0" err="1"/>
+              <a:t>벡터</a:t>
+            </a:r>
+            <a:r>
+              <a:rPr dirty="0"/>
+              <a:t> + BM25 </a:t>
+            </a:r>
+            <a:r>
+              <a:rPr dirty="0" err="1"/>
+              <a:t>하이브리드</a:t>
+            </a:r>
+            <a:r>
+              <a:rPr dirty="0"/>
+              <a:t> → RRF </a:t>
+            </a:r>
+            <a:r>
+              <a:rPr dirty="0" err="1"/>
+              <a:t>순위</a:t>
+            </a:r>
+            <a:r>
+              <a:rPr dirty="0"/>
+              <a:t> </a:t>
+            </a:r>
+            <a:r>
+              <a:rPr dirty="0" err="1"/>
+              <a:t>융합</a:t>
+            </a:r>
+            <a:endParaRPr dirty="0"/>
+          </a:p>
+          <a:p>
+            <a:pPr>
+              <a:lnSpc>
+                <a:spcPct val="150000"/>
+              </a:lnSpc>
+              <a:spcAft>
+                <a:spcPts val="600"/>
+              </a:spcAft>
+              <a:defRPr sz="1300">
+                <a:solidFill>
+                  <a:srgbClr val="444444"/>
+                </a:solidFill>
+              </a:defRPr>
+            </a:pPr>
+            <a:r>
+              <a:rPr dirty="0"/>
+              <a:t>    </a:t>
+            </a:r>
+            <a:r>
+              <a:rPr lang="en-US" altLang="ko-KR" dirty="0"/>
+              <a:t>-. </a:t>
+            </a:r>
+            <a:r>
+              <a:rPr dirty="0" err="1"/>
+              <a:t>다중</a:t>
+            </a:r>
+            <a:r>
+              <a:rPr dirty="0"/>
+              <a:t> </a:t>
+            </a:r>
+            <a:r>
+              <a:rPr dirty="0" err="1"/>
+              <a:t>쿼리</a:t>
+            </a:r>
+            <a:r>
+              <a:rPr lang="en-US" dirty="0"/>
+              <a:t> </a:t>
+            </a:r>
+            <a:r>
+              <a:rPr dirty="0"/>
+              <a:t>: </a:t>
+            </a:r>
+            <a:r>
+              <a:rPr dirty="0" err="1"/>
+              <a:t>분석</a:t>
+            </a:r>
+            <a:r>
+              <a:rPr dirty="0"/>
+              <a:t> </a:t>
+            </a:r>
+            <a:r>
+              <a:rPr dirty="0" err="1"/>
+              <a:t>단계의</a:t>
+            </a:r>
+            <a:r>
+              <a:rPr dirty="0"/>
+              <a:t> </a:t>
+            </a:r>
+            <a:r>
+              <a:rPr dirty="0" err="1"/>
+              <a:t>search_queries</a:t>
+            </a:r>
+            <a:r>
+              <a:rPr dirty="0"/>
+              <a:t> + </a:t>
+            </a:r>
+            <a:r>
+              <a:rPr dirty="0" err="1"/>
+              <a:t>조문</a:t>
+            </a:r>
+            <a:r>
+              <a:rPr dirty="0"/>
+              <a:t> </a:t>
+            </a:r>
+            <a:r>
+              <a:rPr dirty="0" err="1"/>
+              <a:t>후보로</a:t>
+            </a:r>
+            <a:r>
+              <a:rPr dirty="0"/>
+              <a:t> </a:t>
+            </a:r>
+            <a:r>
+              <a:rPr dirty="0" err="1"/>
+              <a:t>재검색</a:t>
+            </a:r>
+            <a:endParaRPr dirty="0"/>
+          </a:p>
+          <a:p>
+            <a:pPr>
+              <a:lnSpc>
+                <a:spcPct val="150000"/>
+              </a:lnSpc>
+              <a:spcAft>
+                <a:spcPts val="600"/>
+              </a:spcAft>
+              <a:defRPr sz="1300">
+                <a:solidFill>
+                  <a:srgbClr val="444444"/>
+                </a:solidFill>
+              </a:defRPr>
+            </a:pPr>
+            <a:r>
+              <a:rPr dirty="0"/>
+              <a:t>    </a:t>
+            </a:r>
+            <a:r>
+              <a:rPr lang="en-US" altLang="ko-KR" dirty="0"/>
+              <a:t>-. </a:t>
+            </a:r>
+            <a:r>
+              <a:rPr dirty="0"/>
+              <a:t>법령7 / 판례5건 </a:t>
+            </a:r>
+            <a:r>
+              <a:rPr dirty="0" err="1"/>
+              <a:t>수집</a:t>
+            </a:r>
+            <a:r>
+              <a:rPr dirty="0"/>
+              <a:t> 후 </a:t>
+            </a:r>
+            <a:r>
+              <a:rPr dirty="0" err="1"/>
+              <a:t>중복</a:t>
+            </a:r>
+            <a:r>
+              <a:rPr dirty="0"/>
+              <a:t> </a:t>
+            </a:r>
+            <a:r>
+              <a:rPr dirty="0" err="1"/>
+              <a:t>제거</a:t>
+            </a:r>
+            <a:endParaRPr lang="en-US" dirty="0"/>
+          </a:p>
+          <a:p>
+            <a:pPr>
+              <a:lnSpc>
+                <a:spcPct val="150000"/>
+              </a:lnSpc>
+              <a:spcAft>
+                <a:spcPts val="600"/>
+              </a:spcAft>
+              <a:defRPr sz="1300">
+                <a:solidFill>
+                  <a:srgbClr val="444444"/>
+                </a:solidFill>
+              </a:defRPr>
+            </a:pPr>
+            <a:endParaRPr dirty="0"/>
+          </a:p>
+          <a:p>
+            <a:pPr>
+              <a:lnSpc>
+                <a:spcPct val="150000"/>
+              </a:lnSpc>
+              <a:spcAft>
+                <a:spcPts val="600"/>
+              </a:spcAft>
+              <a:defRPr sz="1500">
+                <a:solidFill>
+                  <a:srgbClr val="142A4F"/>
+                </a:solidFill>
+              </a:defRPr>
+            </a:pPr>
+            <a:r>
+              <a:rPr b="1" dirty="0"/>
+              <a:t>• </a:t>
+            </a:r>
+            <a:r>
+              <a:rPr b="1" dirty="0" err="1"/>
+              <a:t>운영</a:t>
+            </a:r>
+            <a:r>
+              <a:rPr b="1" dirty="0"/>
+              <a:t> </a:t>
+            </a:r>
+            <a:r>
+              <a:rPr b="1" dirty="0" err="1"/>
+              <a:t>전략</a:t>
+            </a:r>
+            <a:endParaRPr b="1" dirty="0"/>
+          </a:p>
+          <a:p>
+            <a:pPr>
+              <a:lnSpc>
+                <a:spcPct val="150000"/>
+              </a:lnSpc>
+              <a:spcAft>
+                <a:spcPts val="600"/>
+              </a:spcAft>
+              <a:defRPr sz="1300">
+                <a:solidFill>
+                  <a:srgbClr val="444444"/>
+                </a:solidFill>
+              </a:defRPr>
+            </a:pPr>
+            <a:r>
+              <a:rPr dirty="0"/>
+              <a:t>    </a:t>
+            </a:r>
+            <a:r>
+              <a:rPr dirty="0" err="1"/>
+              <a:t>데이터</a:t>
+            </a:r>
+            <a:r>
+              <a:rPr dirty="0"/>
+              <a:t> </a:t>
+            </a:r>
+            <a:r>
+              <a:rPr dirty="0" err="1"/>
+              <a:t>지문</a:t>
+            </a:r>
+            <a:r>
+              <a:rPr dirty="0"/>
+              <a:t>(fingerprint) </a:t>
+            </a:r>
+            <a:r>
+              <a:rPr dirty="0" err="1"/>
+              <a:t>기반</a:t>
+            </a:r>
+            <a:r>
+              <a:rPr dirty="0"/>
+              <a:t> </a:t>
+            </a:r>
+            <a:r>
+              <a:rPr dirty="0" err="1"/>
+              <a:t>컬렉션</a:t>
+            </a:r>
+            <a:r>
+              <a:rPr dirty="0"/>
+              <a:t> </a:t>
+            </a:r>
+            <a:r>
+              <a:rPr dirty="0" err="1"/>
+              <a:t>캐싱</a:t>
+            </a:r>
+            <a:r>
+              <a:rPr dirty="0"/>
+              <a:t> → </a:t>
+            </a:r>
+            <a:r>
+              <a:rPr dirty="0" err="1"/>
+              <a:t>중복</a:t>
+            </a:r>
+            <a:r>
+              <a:rPr dirty="0"/>
+              <a:t> </a:t>
+            </a:r>
+            <a:r>
+              <a:rPr dirty="0" err="1"/>
+              <a:t>임베딩</a:t>
+            </a:r>
+            <a:r>
+              <a:rPr dirty="0"/>
+              <a:t> </a:t>
+            </a:r>
+            <a:r>
+              <a:rPr dirty="0" err="1"/>
+              <a:t>방지</a:t>
+            </a:r>
+            <a:endParaRPr dirty="0"/>
+          </a:p>
+        </p:txBody>
+      </p:sp>
+    </p:spTree>
+  </p:cSld>
+  <p:clrMapOvr>
+    <a:masterClrMapping/>
+  </p:clrMapOvr>
+</p:sld>
+</file>
+
+<file path=ppt/slides/slide13.xml><?xml version="1.0" encoding="utf-8"?>
+<p:sld xmlns:a="http://schemas.openxmlformats.org/drawingml/2006/main" xmlns:r="http://schemas.openxmlformats.org/officeDocument/2006/relationships" xmlns:p="http://schemas.openxmlformats.org/presentationml/2006/main">
+  <p:cSld>
+    <p:spTree>
+      <p:nvGrpSpPr>
+        <p:cNvPr id="1" name=""/>
+        <p:cNvGrpSpPr/>
+        <p:nvPr/>
+      </p:nvGrpSpPr>
+      <p:grpSpPr>
+        <a:xfrm>
+          <a:off x="0" y="0"/>
+          <a:ext cx="0" cy="0"/>
+          <a:chOff x="0" y="0"/>
+          <a:chExt cx="0" cy="0"/>
+        </a:xfrm>
+      </p:grpSpPr>
+      <p:sp>
+        <p:nvSpPr>
+          <p:cNvPr id="2" name="Title 1"/>
+          <p:cNvSpPr>
+            <a:spLocks noGrp="1"/>
+          </p:cNvSpPr>
+          <p:nvPr>
+            <p:ph type="title"/>
+          </p:nvPr>
+        </p:nvSpPr>
+        <p:spPr/>
+        <p:txBody>
+          <a:bodyPr/>
+          <a:lstStyle/>
+          <a:p>
+            <a:pPr>
+              <a:defRPr sz="2800" b="1">
+                <a:solidFill>
+                  <a:srgbClr val="142A4F"/>
+                </a:solidFill>
+              </a:defRPr>
+            </a:pPr>
+            <a:r>
+              <a:t>2-4. 프롬프트 엔지니어링</a:t>
+            </a:r>
+          </a:p>
+        </p:txBody>
+      </p:sp>
+      <p:sp>
+        <p:nvSpPr>
+          <p:cNvPr id="3" name="Rectangle 2"/>
+          <p:cNvSpPr/>
+          <p:nvPr/>
+        </p:nvSpPr>
+        <p:spPr>
+          <a:xfrm>
+            <a:off x="548640" y="1234440"/>
+            <a:ext cx="8229600" cy="45720"/>
+          </a:xfrm>
+          <a:prstGeom prst="rect">
+            <a:avLst/>
+          </a:prstGeom>
+          <a:solidFill>
+            <a:srgbClr val="1F77B4"/>
+          </a:solidFill>
+          <a:ln>
+            <a:noFill/>
+          </a:ln>
+        </p:spPr>
+        <p:style>
+          <a:lnRef idx="1">
+            <a:schemeClr val="accent1"/>
+          </a:lnRef>
+          <a:fillRef idx="3">
+            <a:schemeClr val="accent1"/>
+          </a:fillRef>
+          <a:effectRef idx="2">
+            <a:schemeClr val="accent1"/>
+          </a:effectRef>
+          <a:fontRef idx="minor">
+            <a:schemeClr val="lt1"/>
+          </a:fontRef>
+        </p:style>
+        <p:txBody>
+          <a:bodyPr rtlCol="0" anchor="ctr"/>
+          <a:lstStyle/>
+          <a:p>
+            <a:pPr algn="ctr"/>
+            <a:endParaRPr/>
+          </a:p>
+        </p:txBody>
+      </p:sp>
+      <p:sp>
+        <p:nvSpPr>
+          <p:cNvPr id="4" name="TextBox 3"/>
+          <p:cNvSpPr txBox="1"/>
+          <p:nvPr/>
+        </p:nvSpPr>
+        <p:spPr>
+          <a:xfrm>
+            <a:off x="640080" y="1554480"/>
             <a:ext cx="8138160" cy="4640566"/>
           </a:xfrm>
           <a:prstGeom prst="rect">
@@ -5553,15 +5879,165 @@
           </a:p>
         </p:txBody>
       </p:sp>
+      <p:pic>
+        <p:nvPicPr>
+          <p:cNvPr id="6" name="그림 5">
+            <a:extLst>
+              <a:ext uri="{FF2B5EF4-FFF2-40B4-BE49-F238E27FC236}">
+                <a16:creationId xmlns:a16="http://schemas.microsoft.com/office/drawing/2014/main" id="{1977C00D-5DC6-D0E0-ACFA-BBCFF2EBB183}"/>
+              </a:ext>
+            </a:extLst>
+          </p:cNvPr>
+          <p:cNvPicPr>
+            <a:picLocks noChangeAspect="1"/>
+          </p:cNvPicPr>
+          <p:nvPr/>
+        </p:nvPicPr>
+        <p:blipFill>
+          <a:blip r:embed="rId2"/>
+          <a:stretch>
+            <a:fillRect/>
+          </a:stretch>
+        </p:blipFill>
+        <p:spPr>
+          <a:xfrm>
+            <a:off x="1041220" y="2866700"/>
+            <a:ext cx="6729053" cy="3135028"/>
+          </a:xfrm>
+          <a:prstGeom prst="rect">
+            <a:avLst/>
+          </a:prstGeom>
+        </p:spPr>
+      </p:pic>
     </p:spTree>
   </p:cSld>
   <p:clrMapOvr>
     <a:masterClrMapping/>
   </p:clrMapOvr>
+  <p:timing>
+    <p:tnLst>
+      <p:par>
+        <p:cTn id="1" dur="indefinite" restart="never" nodeType="tmRoot">
+          <p:childTnLst>
+            <p:seq concurrent="1" nextAc="seek">
+              <p:cTn id="2" dur="indefinite" nodeType="mainSeq">
+                <p:childTnLst>
+                  <p:par>
+                    <p:cTn id="3" fill="hold">
+                      <p:stCondLst>
+                        <p:cond delay="indefinite"/>
+                      </p:stCondLst>
+                      <p:childTnLst>
+                        <p:par>
+                          <p:cTn id="4" fill="hold">
+                            <p:stCondLst>
+                              <p:cond delay="0"/>
+                            </p:stCondLst>
+                            <p:childTnLst>
+                              <p:par>
+                                <p:cTn id="5" presetID="1" presetClass="entr" presetSubtype="0" fill="hold" nodeType="clickEffect">
+                                  <p:stCondLst>
+                                    <p:cond delay="0"/>
+                                  </p:stCondLst>
+                                  <p:childTnLst>
+                                    <p:set>
+                                      <p:cBhvr>
+                                        <p:cTn id="6" dur="1" fill="hold">
+                                          <p:stCondLst>
+                                            <p:cond delay="0"/>
+                                          </p:stCondLst>
+                                        </p:cTn>
+                                        <p:tgtEl>
+                                          <p:spTgt spid="6"/>
+                                        </p:tgtEl>
+                                        <p:attrNameLst>
+                                          <p:attrName>style.visibility</p:attrName>
+                                        </p:attrNameLst>
+                                      </p:cBhvr>
+                                      <p:to>
+                                        <p:strVal val="visible"/>
+                                      </p:to>
+                                    </p:set>
+                                  </p:childTnLst>
+                                </p:cTn>
+                              </p:par>
+                            </p:childTnLst>
+                          </p:cTn>
+                        </p:par>
+                      </p:childTnLst>
+                    </p:cTn>
+                  </p:par>
+                  <p:par>
+                    <p:cTn id="7" fill="hold">
+                      <p:stCondLst>
+                        <p:cond delay="indefinite"/>
+                      </p:stCondLst>
+                      <p:childTnLst>
+                        <p:par>
+                          <p:cTn id="8" fill="hold">
+                            <p:stCondLst>
+                              <p:cond delay="0"/>
+                            </p:stCondLst>
+                            <p:childTnLst>
+                              <p:par>
+                                <p:cTn id="9" presetID="1" presetClass="exit" presetSubtype="0" fill="hold" nodeType="clickEffect">
+                                  <p:stCondLst>
+                                    <p:cond delay="0"/>
+                                  </p:stCondLst>
+                                  <p:childTnLst>
+                                    <p:set>
+                                      <p:cBhvr>
+                                        <p:cTn id="10" dur="1" fill="hold">
+                                          <p:stCondLst>
+                                            <p:cond delay="0"/>
+                                          </p:stCondLst>
+                                        </p:cTn>
+                                        <p:tgtEl>
+                                          <p:spTgt spid="6"/>
+                                        </p:tgtEl>
+                                        <p:attrNameLst>
+                                          <p:attrName>style.visibility</p:attrName>
+                                        </p:attrNameLst>
+                                      </p:cBhvr>
+                                      <p:to>
+                                        <p:strVal val="hidden"/>
+                                      </p:to>
+                                    </p:set>
+                                  </p:childTnLst>
+                                </p:cTn>
+                              </p:par>
+                            </p:childTnLst>
+                          </p:cTn>
+                        </p:par>
+                      </p:childTnLst>
+                    </p:cTn>
+                  </p:par>
+                </p:childTnLst>
+              </p:cTn>
+              <p:prevCondLst>
+                <p:cond evt="onPrev" delay="0">
+                  <p:tgtEl>
+                    <p:sldTgt/>
+                  </p:tgtEl>
+                </p:cond>
+              </p:prevCondLst>
+              <p:nextCondLst>
+                <p:cond evt="onNext" delay="0">
+                  <p:tgtEl>
+                    <p:sldTgt/>
+                  </p:tgtEl>
+                </p:cond>
+              </p:nextCondLst>
+            </p:seq>
+          </p:childTnLst>
+        </p:cTn>
+      </p:par>
+    </p:tnLst>
+  </p:timing>
 </p:sld>
 </file>
 
-<file path=ppt/slides/slide13.xml><?xml version="1.0" encoding="utf-8"?>
+<file path=ppt/slides/slide14.xml><?xml version="1.0" encoding="utf-8"?>
 <p:sld xmlns:a="http://schemas.openxmlformats.org/drawingml/2006/main" xmlns:r="http://schemas.openxmlformats.org/officeDocument/2006/relationships" xmlns:p="http://schemas.openxmlformats.org/presentationml/2006/main">
   <p:cSld>
     <p:bg>
@@ -5669,7 +6145,7 @@
 </p:sld>
 </file>
 
-<file path=ppt/slides/slide14.xml><?xml version="1.0" encoding="utf-8"?>
+<file path=ppt/slides/slide15.xml><?xml version="1.0" encoding="utf-8"?>
 <p:sld xmlns:a="http://schemas.openxmlformats.org/drawingml/2006/main" xmlns:r="http://schemas.openxmlformats.org/officeDocument/2006/relationships" xmlns:p="http://schemas.openxmlformats.org/presentationml/2006/main">
   <p:cSld>
     <p:spTree>
@@ -6112,7 +6588,7 @@
 </p:sld>
 </file>
 
-<file path=ppt/slides/slide15.xml><?xml version="1.0" encoding="utf-8"?>
+<file path=ppt/slides/slide16.xml><?xml version="1.0" encoding="utf-8"?>
 <p:sld xmlns:a="http://schemas.openxmlformats.org/drawingml/2006/main" xmlns:r="http://schemas.openxmlformats.org/officeDocument/2006/relationships" xmlns:p="http://schemas.openxmlformats.org/presentationml/2006/main">
   <p:cSld>
     <p:spTree>
@@ -6442,7 +6918,7 @@
 </p:sld>
 </file>
 
-<file path=ppt/slides/slide16.xml><?xml version="1.0" encoding="utf-8"?>
+<file path=ppt/slides/slide17.xml><?xml version="1.0" encoding="utf-8"?>
 <p:sld xmlns:a="http://schemas.openxmlformats.org/drawingml/2006/main" xmlns:r="http://schemas.openxmlformats.org/officeDocument/2006/relationships" xmlns:p="http://schemas.openxmlformats.org/presentationml/2006/main">
   <p:cSld>
     <p:bg>
@@ -6582,7 +7058,7 @@
 </p:sld>
 </file>
 
-<file path=ppt/slides/slide17.xml><?xml version="1.0" encoding="utf-8"?>
+<file path=ppt/slides/slide18.xml><?xml version="1.0" encoding="utf-8"?>
 <p:sld xmlns:a="http://schemas.openxmlformats.org/drawingml/2006/main" xmlns:r="http://schemas.openxmlformats.org/officeDocument/2006/relationships" xmlns:p="http://schemas.openxmlformats.org/presentationml/2006/main">
   <p:cSld>
     <p:spTree>
@@ -7215,7 +7691,7 @@
 </p:sld>
 </file>
 
-<file path=ppt/slides/slide18.xml><?xml version="1.0" encoding="utf-8"?>
+<file path=ppt/slides/slide19.xml><?xml version="1.0" encoding="utf-8"?>
 <p:sld xmlns:a="http://schemas.openxmlformats.org/drawingml/2006/main" xmlns:r="http://schemas.openxmlformats.org/officeDocument/2006/relationships" xmlns:p="http://schemas.openxmlformats.org/presentationml/2006/main">
   <p:cSld>
     <p:spTree>
@@ -7357,7 +7833,534 @@
 </p:sld>
 </file>
 
-<file path=ppt/slides/slide19.xml><?xml version="1.0" encoding="utf-8"?>
+<file path=ppt/slides/slide2.xml><?xml version="1.0" encoding="utf-8"?>
+<p:sld xmlns:a="http://schemas.openxmlformats.org/drawingml/2006/main" xmlns:r="http://schemas.openxmlformats.org/officeDocument/2006/relationships" xmlns:p="http://schemas.openxmlformats.org/presentationml/2006/main">
+  <p:cSld>
+    <p:spTree>
+      <p:nvGrpSpPr>
+        <p:cNvPr id="1" name=""/>
+        <p:cNvGrpSpPr/>
+        <p:nvPr/>
+      </p:nvGrpSpPr>
+      <p:grpSpPr>
+        <a:xfrm>
+          <a:off x="0" y="0"/>
+          <a:ext cx="0" cy="0"/>
+          <a:chOff x="0" y="0"/>
+          <a:chExt cx="0" cy="0"/>
+        </a:xfrm>
+      </p:grpSpPr>
+      <p:sp>
+        <p:nvSpPr>
+          <p:cNvPr id="2" name="Title 1"/>
+          <p:cNvSpPr>
+            <a:spLocks noGrp="1"/>
+          </p:cNvSpPr>
+          <p:nvPr>
+            <p:ph type="title"/>
+          </p:nvPr>
+        </p:nvSpPr>
+        <p:spPr/>
+        <p:txBody>
+          <a:bodyPr/>
+          <a:lstStyle/>
+          <a:p>
+            <a:pPr>
+              <a:defRPr sz="2800" b="1">
+                <a:solidFill>
+                  <a:srgbClr val="142A4F"/>
+                </a:solidFill>
+              </a:defRPr>
+            </a:pPr>
+            <a:r>
+              <a:t>목차</a:t>
+            </a:r>
+          </a:p>
+        </p:txBody>
+      </p:sp>
+      <p:sp>
+        <p:nvSpPr>
+          <p:cNvPr id="3" name="Rectangle 2"/>
+          <p:cNvSpPr/>
+          <p:nvPr/>
+        </p:nvSpPr>
+        <p:spPr>
+          <a:xfrm>
+            <a:off x="548640" y="1234440"/>
+            <a:ext cx="8229600" cy="45720"/>
+          </a:xfrm>
+          <a:prstGeom prst="rect">
+            <a:avLst/>
+          </a:prstGeom>
+          <a:solidFill>
+            <a:srgbClr val="1F77B4"/>
+          </a:solidFill>
+          <a:ln>
+            <a:noFill/>
+          </a:ln>
+        </p:spPr>
+        <p:style>
+          <a:lnRef idx="1">
+            <a:schemeClr val="accent1"/>
+          </a:lnRef>
+          <a:fillRef idx="3">
+            <a:schemeClr val="accent1"/>
+          </a:fillRef>
+          <a:effectRef idx="2">
+            <a:schemeClr val="accent1"/>
+          </a:effectRef>
+          <a:fontRef idx="minor">
+            <a:schemeClr val="lt1"/>
+          </a:fontRef>
+        </p:style>
+        <p:txBody>
+          <a:bodyPr rtlCol="0" anchor="ctr"/>
+          <a:lstStyle/>
+          <a:p>
+            <a:pPr algn="ctr"/>
+            <a:endParaRPr/>
+          </a:p>
+        </p:txBody>
+      </p:sp>
+      <p:sp>
+        <p:nvSpPr>
+          <p:cNvPr id="5" name="TextBox 4">
+            <a:extLst>
+              <a:ext uri="{FF2B5EF4-FFF2-40B4-BE49-F238E27FC236}">
+                <a16:creationId xmlns:a16="http://schemas.microsoft.com/office/drawing/2014/main" id="{9A3AAA92-1F65-95EE-922F-CAE71AF94F3F}"/>
+              </a:ext>
+            </a:extLst>
+          </p:cNvPr>
+          <p:cNvSpPr txBox="1"/>
+          <p:nvPr/>
+        </p:nvSpPr>
+        <p:spPr>
+          <a:xfrm>
+            <a:off x="548640" y="1830491"/>
+            <a:ext cx="7726795" cy="3580467"/>
+          </a:xfrm>
+          <a:prstGeom prst="rect">
+            <a:avLst/>
+          </a:prstGeom>
+          <a:noFill/>
+        </p:spPr>
+        <p:txBody>
+          <a:bodyPr wrap="none" rtlCol="0">
+            <a:spAutoFit/>
+          </a:bodyPr>
+          <a:lstStyle/>
+          <a:p>
+            <a:pPr>
+              <a:lnSpc>
+                <a:spcPct val="200000"/>
+              </a:lnSpc>
+              <a:spcAft>
+                <a:spcPts val="1400"/>
+              </a:spcAft>
+              <a:defRPr sz="2000">
+                <a:solidFill>
+                  <a:srgbClr val="142A4F"/>
+                </a:solidFill>
+              </a:defRPr>
+            </a:pPr>
+            <a:r>
+              <a:rPr lang="en-US" altLang="ko-KR" sz="2000" b="1" dirty="0">
+                <a:solidFill>
+                  <a:srgbClr val="142A4F"/>
+                </a:solidFill>
+              </a:rPr>
+              <a:t>• Chapter 1. </a:t>
+            </a:r>
+            <a:r>
+              <a:rPr lang="ko-KR" altLang="en-US" sz="2000" b="1" dirty="0">
+                <a:solidFill>
+                  <a:srgbClr val="142A4F"/>
+                </a:solidFill>
+              </a:rPr>
+              <a:t>개요 </a:t>
+            </a:r>
+            <a:r>
+              <a:rPr lang="en-US" altLang="ko-KR" sz="2000" dirty="0">
+                <a:solidFill>
+                  <a:srgbClr val="142A4F"/>
+                </a:solidFill>
+              </a:rPr>
+              <a:t>: </a:t>
+            </a:r>
+            <a:r>
+              <a:rPr lang="ko-KR" altLang="en-US" dirty="0">
+                <a:solidFill>
+                  <a:schemeClr val="tx1">
+                    <a:lumMod val="65000"/>
+                    <a:lumOff val="35000"/>
+                  </a:schemeClr>
+                </a:solidFill>
+              </a:rPr>
+              <a:t>목적 </a:t>
+            </a:r>
+            <a:r>
+              <a:rPr lang="en-US" altLang="ko-KR" dirty="0">
+                <a:solidFill>
+                  <a:schemeClr val="tx1">
+                    <a:lumMod val="65000"/>
+                    <a:lumOff val="35000"/>
+                  </a:schemeClr>
+                </a:solidFill>
+              </a:rPr>
+              <a:t>· </a:t>
+            </a:r>
+            <a:r>
+              <a:rPr lang="ko-KR" altLang="en-US" dirty="0">
+                <a:solidFill>
+                  <a:schemeClr val="tx1">
+                    <a:lumMod val="65000"/>
+                    <a:lumOff val="35000"/>
+                  </a:schemeClr>
+                </a:solidFill>
+              </a:rPr>
+              <a:t>가능</a:t>
+            </a:r>
+            <a:r>
+              <a:rPr lang="en-US" altLang="ko-KR" dirty="0">
+                <a:solidFill>
+                  <a:schemeClr val="tx1">
+                    <a:lumMod val="65000"/>
+                    <a:lumOff val="35000"/>
+                  </a:schemeClr>
+                </a:solidFill>
+              </a:rPr>
+              <a:t>/</a:t>
+            </a:r>
+            <a:r>
+              <a:rPr lang="ko-KR" altLang="en-US" dirty="0">
+                <a:solidFill>
+                  <a:schemeClr val="tx1">
+                    <a:lumMod val="65000"/>
+                    <a:lumOff val="35000"/>
+                  </a:schemeClr>
+                </a:solidFill>
+              </a:rPr>
+              <a:t>불가능 </a:t>
+            </a:r>
+            <a:r>
+              <a:rPr lang="en-US" altLang="ko-KR" dirty="0">
+                <a:solidFill>
+                  <a:schemeClr val="tx1">
+                    <a:lumMod val="65000"/>
+                    <a:lumOff val="35000"/>
+                  </a:schemeClr>
+                </a:solidFill>
+              </a:rPr>
+              <a:t>· </a:t>
+            </a:r>
+            <a:r>
+              <a:rPr lang="ko-KR" altLang="en-US" dirty="0">
+                <a:solidFill>
+                  <a:schemeClr val="tx1">
+                    <a:lumMod val="65000"/>
+                    <a:lumOff val="35000"/>
+                  </a:schemeClr>
+                </a:solidFill>
+              </a:rPr>
+              <a:t>신뢰도</a:t>
+            </a:r>
+            <a:endParaRPr lang="ko-KR" altLang="en-US" sz="2000" dirty="0">
+              <a:solidFill>
+                <a:schemeClr val="tx1">
+                  <a:lumMod val="65000"/>
+                  <a:lumOff val="35000"/>
+                </a:schemeClr>
+              </a:solidFill>
+            </a:endParaRPr>
+          </a:p>
+          <a:p>
+            <a:pPr>
+              <a:lnSpc>
+                <a:spcPct val="200000"/>
+              </a:lnSpc>
+              <a:spcAft>
+                <a:spcPts val="1400"/>
+              </a:spcAft>
+              <a:defRPr sz="2000">
+                <a:solidFill>
+                  <a:srgbClr val="142A4F"/>
+                </a:solidFill>
+              </a:defRPr>
+            </a:pPr>
+            <a:r>
+              <a:rPr lang="en-US" altLang="ko-KR" sz="2000" b="1" dirty="0">
+                <a:solidFill>
+                  <a:srgbClr val="142A4F"/>
+                </a:solidFill>
+              </a:rPr>
+              <a:t>• Chapter 2. </a:t>
+            </a:r>
+            <a:r>
+              <a:rPr lang="ko-KR" altLang="en-US" sz="2000" b="1" dirty="0">
+                <a:solidFill>
+                  <a:srgbClr val="142A4F"/>
+                </a:solidFill>
+              </a:rPr>
+              <a:t>사용한 기술 </a:t>
+            </a:r>
+            <a:r>
+              <a:rPr lang="en-US" altLang="ko-KR" sz="2000" dirty="0">
+                <a:solidFill>
+                  <a:srgbClr val="142A4F"/>
+                </a:solidFill>
+              </a:rPr>
+              <a:t>: </a:t>
+            </a:r>
+            <a:r>
+              <a:rPr lang="ko-KR" altLang="en-US" sz="2000" dirty="0">
+                <a:solidFill>
+                  <a:schemeClr val="tx1">
+                    <a:lumMod val="65000"/>
+                    <a:lumOff val="35000"/>
+                  </a:schemeClr>
+                </a:solidFill>
+              </a:rPr>
+              <a:t>모델 </a:t>
+            </a:r>
+            <a:r>
+              <a:rPr lang="en-US" altLang="ko-KR" sz="2000" dirty="0">
+                <a:solidFill>
+                  <a:schemeClr val="tx1">
+                    <a:lumMod val="65000"/>
+                    <a:lumOff val="35000"/>
+                  </a:schemeClr>
+                </a:solidFill>
+              </a:rPr>
+              <a:t>· </a:t>
+            </a:r>
+            <a:r>
+              <a:rPr lang="ko-KR" altLang="en-US" sz="2000" dirty="0">
+                <a:solidFill>
+                  <a:schemeClr val="tx1">
+                    <a:lumMod val="65000"/>
+                    <a:lumOff val="35000"/>
+                  </a:schemeClr>
+                </a:solidFill>
+              </a:rPr>
+              <a:t>프레임워크 </a:t>
+            </a:r>
+            <a:r>
+              <a:rPr lang="en-US" altLang="ko-KR" sz="2000" dirty="0">
+                <a:solidFill>
+                  <a:schemeClr val="tx1">
+                    <a:lumMod val="65000"/>
+                    <a:lumOff val="35000"/>
+                  </a:schemeClr>
+                </a:solidFill>
+              </a:rPr>
+              <a:t>· Tool · </a:t>
+            </a:r>
+            <a:r>
+              <a:rPr lang="ko-KR" altLang="en-US" sz="2000" dirty="0">
+                <a:solidFill>
+                  <a:schemeClr val="tx1">
+                    <a:lumMod val="65000"/>
+                    <a:lumOff val="35000"/>
+                  </a:schemeClr>
+                </a:solidFill>
+              </a:rPr>
+              <a:t>전략 </a:t>
+            </a:r>
+            <a:r>
+              <a:rPr lang="en-US" altLang="ko-KR" sz="2000" dirty="0">
+                <a:solidFill>
+                  <a:schemeClr val="tx1">
+                    <a:lumMod val="65000"/>
+                    <a:lumOff val="35000"/>
+                  </a:schemeClr>
+                </a:solidFill>
+              </a:rPr>
+              <a:t>· </a:t>
+            </a:r>
+            <a:r>
+              <a:rPr lang="ko-KR" altLang="en-US" sz="2000" dirty="0">
+                <a:solidFill>
+                  <a:schemeClr val="tx1">
+                    <a:lumMod val="65000"/>
+                    <a:lumOff val="35000"/>
+                  </a:schemeClr>
+                </a:solidFill>
+              </a:rPr>
+              <a:t>프롬프트</a:t>
+            </a:r>
+          </a:p>
+          <a:p>
+            <a:pPr>
+              <a:lnSpc>
+                <a:spcPct val="200000"/>
+              </a:lnSpc>
+              <a:spcAft>
+                <a:spcPts val="1400"/>
+              </a:spcAft>
+              <a:defRPr sz="2000">
+                <a:solidFill>
+                  <a:srgbClr val="142A4F"/>
+                </a:solidFill>
+              </a:defRPr>
+            </a:pPr>
+            <a:r>
+              <a:rPr lang="en-US" altLang="ko-KR" sz="2000" b="1" dirty="0">
+                <a:solidFill>
+                  <a:srgbClr val="142A4F"/>
+                </a:solidFill>
+              </a:rPr>
+              <a:t>• Chapter 3. Workflow </a:t>
+            </a:r>
+            <a:r>
+              <a:rPr lang="en-US" altLang="ko-KR" sz="2000" dirty="0">
+                <a:solidFill>
+                  <a:srgbClr val="142A4F"/>
+                </a:solidFill>
+              </a:rPr>
+              <a:t>: </a:t>
+            </a:r>
+            <a:r>
+              <a:rPr lang="ko-KR" altLang="en-US" sz="2000" dirty="0">
+                <a:solidFill>
+                  <a:schemeClr val="tx1">
+                    <a:lumMod val="65000"/>
+                    <a:lumOff val="35000"/>
+                  </a:schemeClr>
+                </a:solidFill>
+              </a:rPr>
+              <a:t>상담 흐름도 </a:t>
+            </a:r>
+            <a:r>
+              <a:rPr lang="en-US" altLang="ko-KR" sz="2000" dirty="0">
+                <a:solidFill>
+                  <a:schemeClr val="tx1">
+                    <a:lumMod val="65000"/>
+                    <a:lumOff val="35000"/>
+                  </a:schemeClr>
+                </a:solidFill>
+              </a:rPr>
+              <a:t>· </a:t>
+            </a:r>
+            <a:r>
+              <a:rPr lang="en-US" altLang="ko-KR" sz="2000" dirty="0" err="1">
+                <a:solidFill>
+                  <a:schemeClr val="tx1">
+                    <a:lumMod val="65000"/>
+                    <a:lumOff val="35000"/>
+                  </a:schemeClr>
+                </a:solidFill>
+              </a:rPr>
+              <a:t>LangGraph</a:t>
+            </a:r>
+            <a:r>
+              <a:rPr lang="ko-KR" altLang="en-US" sz="2000" dirty="0">
+                <a:solidFill>
+                  <a:schemeClr val="tx1">
+                    <a:lumMod val="65000"/>
+                    <a:lumOff val="35000"/>
+                  </a:schemeClr>
+                </a:solidFill>
+              </a:rPr>
+              <a:t> 구조</a:t>
+            </a:r>
+          </a:p>
+          <a:p>
+            <a:pPr>
+              <a:lnSpc>
+                <a:spcPct val="200000"/>
+              </a:lnSpc>
+              <a:spcAft>
+                <a:spcPts val="1400"/>
+              </a:spcAft>
+              <a:defRPr sz="2000">
+                <a:solidFill>
+                  <a:srgbClr val="142A4F"/>
+                </a:solidFill>
+              </a:defRPr>
+            </a:pPr>
+            <a:r>
+              <a:rPr lang="en-US" altLang="ko-KR" sz="2000" b="1" dirty="0">
+                <a:solidFill>
+                  <a:srgbClr val="142A4F"/>
+                </a:solidFill>
+              </a:rPr>
+              <a:t>• Chapter 4. </a:t>
+            </a:r>
+            <a:r>
+              <a:rPr lang="ko-KR" altLang="en-US" sz="2000" b="1" dirty="0">
+                <a:solidFill>
+                  <a:srgbClr val="142A4F"/>
+                </a:solidFill>
+              </a:rPr>
+              <a:t>검증 </a:t>
+            </a:r>
+            <a:r>
+              <a:rPr lang="en-US" altLang="ko-KR" sz="2000" dirty="0">
+                <a:solidFill>
+                  <a:srgbClr val="142A4F"/>
+                </a:solidFill>
+              </a:rPr>
+              <a:t>: </a:t>
+            </a:r>
+            <a:r>
+              <a:rPr lang="en-US" altLang="ko-KR" sz="2000" dirty="0">
+                <a:solidFill>
+                  <a:schemeClr val="tx1">
+                    <a:lumMod val="65000"/>
+                    <a:lumOff val="35000"/>
+                  </a:schemeClr>
+                </a:solidFill>
+              </a:rPr>
+              <a:t>Golden Set · </a:t>
+            </a:r>
+            <a:r>
+              <a:rPr lang="ko-KR" altLang="en-US" sz="2000" dirty="0">
+                <a:solidFill>
+                  <a:schemeClr val="tx1">
+                    <a:lumMod val="65000"/>
+                    <a:lumOff val="35000"/>
+                  </a:schemeClr>
+                </a:solidFill>
+              </a:rPr>
+              <a:t>자동 채점 </a:t>
+            </a:r>
+            <a:r>
+              <a:rPr lang="en-US" altLang="ko-KR" sz="2000" dirty="0">
+                <a:solidFill>
+                  <a:schemeClr val="tx1">
+                    <a:lumMod val="65000"/>
+                    <a:lumOff val="35000"/>
+                  </a:schemeClr>
+                </a:solidFill>
+              </a:rPr>
+              <a:t>· Ablation </a:t>
+            </a:r>
+            <a:r>
+              <a:rPr lang="ko-KR" altLang="en-US" sz="2000" dirty="0">
+                <a:solidFill>
+                  <a:schemeClr val="tx1">
+                    <a:lumMod val="65000"/>
+                    <a:lumOff val="35000"/>
+                  </a:schemeClr>
+                </a:solidFill>
+              </a:rPr>
+              <a:t>비교</a:t>
+            </a:r>
+          </a:p>
+          <a:p>
+            <a:endParaRPr lang="ko-KR" altLang="en-US" dirty="0"/>
+          </a:p>
+        </p:txBody>
+      </p:sp>
+    </p:spTree>
+  </p:cSld>
+  <p:clrMapOvr>
+    <a:masterClrMapping/>
+  </p:clrMapOvr>
+</p:sld>
+</file>
+
+<file path=ppt/slides/slide20.xml><?xml version="1.0" encoding="utf-8"?>
 <p:sld xmlns:a="http://schemas.openxmlformats.org/drawingml/2006/main" xmlns:r="http://schemas.openxmlformats.org/officeDocument/2006/relationships" xmlns:p="http://schemas.openxmlformats.org/presentationml/2006/main">
   <p:cSld>
     <p:spTree>
@@ -7499,7 +8502,7 @@
 </p:sld>
 </file>
 
-<file path=ppt/slides/slide2.xml><?xml version="1.0" encoding="utf-8"?>
+<file path=ppt/slides/slide21.xml><?xml version="1.0" encoding="utf-8"?>
 <p:sld xmlns:a="http://schemas.openxmlformats.org/drawingml/2006/main" xmlns:r="http://schemas.openxmlformats.org/officeDocument/2006/relationships" xmlns:p="http://schemas.openxmlformats.org/presentationml/2006/main">
   <p:cSld>
     <p:spTree>
@@ -7539,7 +8542,7 @@
               </a:defRPr>
             </a:pPr>
             <a:r>
-              <a:t>목차</a:t>
+              <a:t>4-2. 검증 방법 (LLM-as-a-Judge)</a:t>
             </a:r>
           </a:p>
         </p:txBody>
@@ -7590,533 +8593,6 @@
       </p:sp>
       <p:sp>
         <p:nvSpPr>
-          <p:cNvPr id="5" name="TextBox 4">
-            <a:extLst>
-              <a:ext uri="{FF2B5EF4-FFF2-40B4-BE49-F238E27FC236}">
-                <a16:creationId xmlns:a16="http://schemas.microsoft.com/office/drawing/2014/main" id="{9A3AAA92-1F65-95EE-922F-CAE71AF94F3F}"/>
-              </a:ext>
-            </a:extLst>
-          </p:cNvPr>
-          <p:cNvSpPr txBox="1"/>
-          <p:nvPr/>
-        </p:nvSpPr>
-        <p:spPr>
-          <a:xfrm>
-            <a:off x="548640" y="1830491"/>
-            <a:ext cx="7726795" cy="3580467"/>
-          </a:xfrm>
-          <a:prstGeom prst="rect">
-            <a:avLst/>
-          </a:prstGeom>
-          <a:noFill/>
-        </p:spPr>
-        <p:txBody>
-          <a:bodyPr wrap="none" rtlCol="0">
-            <a:spAutoFit/>
-          </a:bodyPr>
-          <a:lstStyle/>
-          <a:p>
-            <a:pPr>
-              <a:lnSpc>
-                <a:spcPct val="200000"/>
-              </a:lnSpc>
-              <a:spcAft>
-                <a:spcPts val="1400"/>
-              </a:spcAft>
-              <a:defRPr sz="2000">
-                <a:solidFill>
-                  <a:srgbClr val="142A4F"/>
-                </a:solidFill>
-              </a:defRPr>
-            </a:pPr>
-            <a:r>
-              <a:rPr lang="en-US" altLang="ko-KR" sz="2000" b="1" dirty="0">
-                <a:solidFill>
-                  <a:srgbClr val="142A4F"/>
-                </a:solidFill>
-              </a:rPr>
-              <a:t>• Chapter 1. </a:t>
-            </a:r>
-            <a:r>
-              <a:rPr lang="ko-KR" altLang="en-US" sz="2000" b="1" dirty="0">
-                <a:solidFill>
-                  <a:srgbClr val="142A4F"/>
-                </a:solidFill>
-              </a:rPr>
-              <a:t>개요 </a:t>
-            </a:r>
-            <a:r>
-              <a:rPr lang="en-US" altLang="ko-KR" sz="2000" dirty="0">
-                <a:solidFill>
-                  <a:srgbClr val="142A4F"/>
-                </a:solidFill>
-              </a:rPr>
-              <a:t>: </a:t>
-            </a:r>
-            <a:r>
-              <a:rPr lang="ko-KR" altLang="en-US" dirty="0">
-                <a:solidFill>
-                  <a:schemeClr val="tx1">
-                    <a:lumMod val="65000"/>
-                    <a:lumOff val="35000"/>
-                  </a:schemeClr>
-                </a:solidFill>
-              </a:rPr>
-              <a:t>목적 </a:t>
-            </a:r>
-            <a:r>
-              <a:rPr lang="en-US" altLang="ko-KR" dirty="0">
-                <a:solidFill>
-                  <a:schemeClr val="tx1">
-                    <a:lumMod val="65000"/>
-                    <a:lumOff val="35000"/>
-                  </a:schemeClr>
-                </a:solidFill>
-              </a:rPr>
-              <a:t>· </a:t>
-            </a:r>
-            <a:r>
-              <a:rPr lang="ko-KR" altLang="en-US" dirty="0">
-                <a:solidFill>
-                  <a:schemeClr val="tx1">
-                    <a:lumMod val="65000"/>
-                    <a:lumOff val="35000"/>
-                  </a:schemeClr>
-                </a:solidFill>
-              </a:rPr>
-              <a:t>가능</a:t>
-            </a:r>
-            <a:r>
-              <a:rPr lang="en-US" altLang="ko-KR" dirty="0">
-                <a:solidFill>
-                  <a:schemeClr val="tx1">
-                    <a:lumMod val="65000"/>
-                    <a:lumOff val="35000"/>
-                  </a:schemeClr>
-                </a:solidFill>
-              </a:rPr>
-              <a:t>/</a:t>
-            </a:r>
-            <a:r>
-              <a:rPr lang="ko-KR" altLang="en-US" dirty="0">
-                <a:solidFill>
-                  <a:schemeClr val="tx1">
-                    <a:lumMod val="65000"/>
-                    <a:lumOff val="35000"/>
-                  </a:schemeClr>
-                </a:solidFill>
-              </a:rPr>
-              <a:t>불가능 </a:t>
-            </a:r>
-            <a:r>
-              <a:rPr lang="en-US" altLang="ko-KR" dirty="0">
-                <a:solidFill>
-                  <a:schemeClr val="tx1">
-                    <a:lumMod val="65000"/>
-                    <a:lumOff val="35000"/>
-                  </a:schemeClr>
-                </a:solidFill>
-              </a:rPr>
-              <a:t>· </a:t>
-            </a:r>
-            <a:r>
-              <a:rPr lang="ko-KR" altLang="en-US" dirty="0">
-                <a:solidFill>
-                  <a:schemeClr val="tx1">
-                    <a:lumMod val="65000"/>
-                    <a:lumOff val="35000"/>
-                  </a:schemeClr>
-                </a:solidFill>
-              </a:rPr>
-              <a:t>신뢰도</a:t>
-            </a:r>
-            <a:endParaRPr lang="ko-KR" altLang="en-US" sz="2000" dirty="0">
-              <a:solidFill>
-                <a:schemeClr val="tx1">
-                  <a:lumMod val="65000"/>
-                  <a:lumOff val="35000"/>
-                </a:schemeClr>
-              </a:solidFill>
-            </a:endParaRPr>
-          </a:p>
-          <a:p>
-            <a:pPr>
-              <a:lnSpc>
-                <a:spcPct val="200000"/>
-              </a:lnSpc>
-              <a:spcAft>
-                <a:spcPts val="1400"/>
-              </a:spcAft>
-              <a:defRPr sz="2000">
-                <a:solidFill>
-                  <a:srgbClr val="142A4F"/>
-                </a:solidFill>
-              </a:defRPr>
-            </a:pPr>
-            <a:r>
-              <a:rPr lang="en-US" altLang="ko-KR" sz="2000" b="1" dirty="0">
-                <a:solidFill>
-                  <a:srgbClr val="142A4F"/>
-                </a:solidFill>
-              </a:rPr>
-              <a:t>• Chapter 2. </a:t>
-            </a:r>
-            <a:r>
-              <a:rPr lang="ko-KR" altLang="en-US" sz="2000" b="1" dirty="0">
-                <a:solidFill>
-                  <a:srgbClr val="142A4F"/>
-                </a:solidFill>
-              </a:rPr>
-              <a:t>사용한 기술 </a:t>
-            </a:r>
-            <a:r>
-              <a:rPr lang="en-US" altLang="ko-KR" sz="2000" dirty="0">
-                <a:solidFill>
-                  <a:srgbClr val="142A4F"/>
-                </a:solidFill>
-              </a:rPr>
-              <a:t>: </a:t>
-            </a:r>
-            <a:r>
-              <a:rPr lang="ko-KR" altLang="en-US" sz="2000" dirty="0">
-                <a:solidFill>
-                  <a:schemeClr val="tx1">
-                    <a:lumMod val="65000"/>
-                    <a:lumOff val="35000"/>
-                  </a:schemeClr>
-                </a:solidFill>
-              </a:rPr>
-              <a:t>모델 </a:t>
-            </a:r>
-            <a:r>
-              <a:rPr lang="en-US" altLang="ko-KR" sz="2000" dirty="0">
-                <a:solidFill>
-                  <a:schemeClr val="tx1">
-                    <a:lumMod val="65000"/>
-                    <a:lumOff val="35000"/>
-                  </a:schemeClr>
-                </a:solidFill>
-              </a:rPr>
-              <a:t>· </a:t>
-            </a:r>
-            <a:r>
-              <a:rPr lang="ko-KR" altLang="en-US" sz="2000" dirty="0">
-                <a:solidFill>
-                  <a:schemeClr val="tx1">
-                    <a:lumMod val="65000"/>
-                    <a:lumOff val="35000"/>
-                  </a:schemeClr>
-                </a:solidFill>
-              </a:rPr>
-              <a:t>프레임워크 </a:t>
-            </a:r>
-            <a:r>
-              <a:rPr lang="en-US" altLang="ko-KR" sz="2000" dirty="0">
-                <a:solidFill>
-                  <a:schemeClr val="tx1">
-                    <a:lumMod val="65000"/>
-                    <a:lumOff val="35000"/>
-                  </a:schemeClr>
-                </a:solidFill>
-              </a:rPr>
-              <a:t>· Tool · </a:t>
-            </a:r>
-            <a:r>
-              <a:rPr lang="ko-KR" altLang="en-US" sz="2000" dirty="0">
-                <a:solidFill>
-                  <a:schemeClr val="tx1">
-                    <a:lumMod val="65000"/>
-                    <a:lumOff val="35000"/>
-                  </a:schemeClr>
-                </a:solidFill>
-              </a:rPr>
-              <a:t>전략 </a:t>
-            </a:r>
-            <a:r>
-              <a:rPr lang="en-US" altLang="ko-KR" sz="2000" dirty="0">
-                <a:solidFill>
-                  <a:schemeClr val="tx1">
-                    <a:lumMod val="65000"/>
-                    <a:lumOff val="35000"/>
-                  </a:schemeClr>
-                </a:solidFill>
-              </a:rPr>
-              <a:t>· </a:t>
-            </a:r>
-            <a:r>
-              <a:rPr lang="ko-KR" altLang="en-US" sz="2000" dirty="0">
-                <a:solidFill>
-                  <a:schemeClr val="tx1">
-                    <a:lumMod val="65000"/>
-                    <a:lumOff val="35000"/>
-                  </a:schemeClr>
-                </a:solidFill>
-              </a:rPr>
-              <a:t>프롬프트</a:t>
-            </a:r>
-          </a:p>
-          <a:p>
-            <a:pPr>
-              <a:lnSpc>
-                <a:spcPct val="200000"/>
-              </a:lnSpc>
-              <a:spcAft>
-                <a:spcPts val="1400"/>
-              </a:spcAft>
-              <a:defRPr sz="2000">
-                <a:solidFill>
-                  <a:srgbClr val="142A4F"/>
-                </a:solidFill>
-              </a:defRPr>
-            </a:pPr>
-            <a:r>
-              <a:rPr lang="en-US" altLang="ko-KR" sz="2000" b="1" dirty="0">
-                <a:solidFill>
-                  <a:srgbClr val="142A4F"/>
-                </a:solidFill>
-              </a:rPr>
-              <a:t>• Chapter 3. Workflow </a:t>
-            </a:r>
-            <a:r>
-              <a:rPr lang="en-US" altLang="ko-KR" sz="2000" dirty="0">
-                <a:solidFill>
-                  <a:srgbClr val="142A4F"/>
-                </a:solidFill>
-              </a:rPr>
-              <a:t>: </a:t>
-            </a:r>
-            <a:r>
-              <a:rPr lang="ko-KR" altLang="en-US" sz="2000" dirty="0">
-                <a:solidFill>
-                  <a:schemeClr val="tx1">
-                    <a:lumMod val="65000"/>
-                    <a:lumOff val="35000"/>
-                  </a:schemeClr>
-                </a:solidFill>
-              </a:rPr>
-              <a:t>상담 흐름도 </a:t>
-            </a:r>
-            <a:r>
-              <a:rPr lang="en-US" altLang="ko-KR" sz="2000" dirty="0">
-                <a:solidFill>
-                  <a:schemeClr val="tx1">
-                    <a:lumMod val="65000"/>
-                    <a:lumOff val="35000"/>
-                  </a:schemeClr>
-                </a:solidFill>
-              </a:rPr>
-              <a:t>· </a:t>
-            </a:r>
-            <a:r>
-              <a:rPr lang="en-US" altLang="ko-KR" sz="2000" dirty="0" err="1">
-                <a:solidFill>
-                  <a:schemeClr val="tx1">
-                    <a:lumMod val="65000"/>
-                    <a:lumOff val="35000"/>
-                  </a:schemeClr>
-                </a:solidFill>
-              </a:rPr>
-              <a:t>LangGraph</a:t>
-            </a:r>
-            <a:r>
-              <a:rPr lang="ko-KR" altLang="en-US" sz="2000" dirty="0">
-                <a:solidFill>
-                  <a:schemeClr val="tx1">
-                    <a:lumMod val="65000"/>
-                    <a:lumOff val="35000"/>
-                  </a:schemeClr>
-                </a:solidFill>
-              </a:rPr>
-              <a:t> 구조</a:t>
-            </a:r>
-          </a:p>
-          <a:p>
-            <a:pPr>
-              <a:lnSpc>
-                <a:spcPct val="200000"/>
-              </a:lnSpc>
-              <a:spcAft>
-                <a:spcPts val="1400"/>
-              </a:spcAft>
-              <a:defRPr sz="2000">
-                <a:solidFill>
-                  <a:srgbClr val="142A4F"/>
-                </a:solidFill>
-              </a:defRPr>
-            </a:pPr>
-            <a:r>
-              <a:rPr lang="en-US" altLang="ko-KR" sz="2000" b="1" dirty="0">
-                <a:solidFill>
-                  <a:srgbClr val="142A4F"/>
-                </a:solidFill>
-              </a:rPr>
-              <a:t>• Chapter 4. </a:t>
-            </a:r>
-            <a:r>
-              <a:rPr lang="ko-KR" altLang="en-US" sz="2000" b="1" dirty="0">
-                <a:solidFill>
-                  <a:srgbClr val="142A4F"/>
-                </a:solidFill>
-              </a:rPr>
-              <a:t>검증 </a:t>
-            </a:r>
-            <a:r>
-              <a:rPr lang="en-US" altLang="ko-KR" sz="2000" dirty="0">
-                <a:solidFill>
-                  <a:srgbClr val="142A4F"/>
-                </a:solidFill>
-              </a:rPr>
-              <a:t>: </a:t>
-            </a:r>
-            <a:r>
-              <a:rPr lang="en-US" altLang="ko-KR" sz="2000" dirty="0">
-                <a:solidFill>
-                  <a:schemeClr val="tx1">
-                    <a:lumMod val="65000"/>
-                    <a:lumOff val="35000"/>
-                  </a:schemeClr>
-                </a:solidFill>
-              </a:rPr>
-              <a:t>Gold Test Set · </a:t>
-            </a:r>
-            <a:r>
-              <a:rPr lang="ko-KR" altLang="en-US" sz="2000" dirty="0">
-                <a:solidFill>
-                  <a:schemeClr val="tx1">
-                    <a:lumMod val="65000"/>
-                    <a:lumOff val="35000"/>
-                  </a:schemeClr>
-                </a:solidFill>
-              </a:rPr>
-              <a:t>자동 채점 </a:t>
-            </a:r>
-            <a:r>
-              <a:rPr lang="en-US" altLang="ko-KR" sz="2000" dirty="0">
-                <a:solidFill>
-                  <a:schemeClr val="tx1">
-                    <a:lumMod val="65000"/>
-                    <a:lumOff val="35000"/>
-                  </a:schemeClr>
-                </a:solidFill>
-              </a:rPr>
-              <a:t>· Ablation </a:t>
-            </a:r>
-            <a:r>
-              <a:rPr lang="ko-KR" altLang="en-US" sz="2000" dirty="0">
-                <a:solidFill>
-                  <a:schemeClr val="tx1">
-                    <a:lumMod val="65000"/>
-                    <a:lumOff val="35000"/>
-                  </a:schemeClr>
-                </a:solidFill>
-              </a:rPr>
-              <a:t>비교</a:t>
-            </a:r>
-          </a:p>
-          <a:p>
-            <a:endParaRPr lang="ko-KR" altLang="en-US" dirty="0"/>
-          </a:p>
-        </p:txBody>
-      </p:sp>
-    </p:spTree>
-  </p:cSld>
-  <p:clrMapOvr>
-    <a:masterClrMapping/>
-  </p:clrMapOvr>
-</p:sld>
-</file>
-
-<file path=ppt/slides/slide20.xml><?xml version="1.0" encoding="utf-8"?>
-<p:sld xmlns:a="http://schemas.openxmlformats.org/drawingml/2006/main" xmlns:r="http://schemas.openxmlformats.org/officeDocument/2006/relationships" xmlns:p="http://schemas.openxmlformats.org/presentationml/2006/main">
-  <p:cSld>
-    <p:spTree>
-      <p:nvGrpSpPr>
-        <p:cNvPr id="1" name=""/>
-        <p:cNvGrpSpPr/>
-        <p:nvPr/>
-      </p:nvGrpSpPr>
-      <p:grpSpPr>
-        <a:xfrm>
-          <a:off x="0" y="0"/>
-          <a:ext cx="0" cy="0"/>
-          <a:chOff x="0" y="0"/>
-          <a:chExt cx="0" cy="0"/>
-        </a:xfrm>
-      </p:grpSpPr>
-      <p:sp>
-        <p:nvSpPr>
-          <p:cNvPr id="2" name="Title 1"/>
-          <p:cNvSpPr>
-            <a:spLocks noGrp="1"/>
-          </p:cNvSpPr>
-          <p:nvPr>
-            <p:ph type="title"/>
-          </p:nvPr>
-        </p:nvSpPr>
-        <p:spPr/>
-        <p:txBody>
-          <a:bodyPr/>
-          <a:lstStyle/>
-          <a:p>
-            <a:pPr>
-              <a:defRPr sz="2800" b="1">
-                <a:solidFill>
-                  <a:srgbClr val="142A4F"/>
-                </a:solidFill>
-              </a:defRPr>
-            </a:pPr>
-            <a:r>
-              <a:t>4-2. 검증 방법 (LLM-as-a-Judge)</a:t>
-            </a:r>
-          </a:p>
-        </p:txBody>
-      </p:sp>
-      <p:sp>
-        <p:nvSpPr>
-          <p:cNvPr id="3" name="Rectangle 2"/>
-          <p:cNvSpPr/>
-          <p:nvPr/>
-        </p:nvSpPr>
-        <p:spPr>
-          <a:xfrm>
-            <a:off x="548640" y="1234440"/>
-            <a:ext cx="8229600" cy="45720"/>
-          </a:xfrm>
-          <a:prstGeom prst="rect">
-            <a:avLst/>
-          </a:prstGeom>
-          <a:solidFill>
-            <a:srgbClr val="1F77B4"/>
-          </a:solidFill>
-          <a:ln>
-            <a:noFill/>
-          </a:ln>
-        </p:spPr>
-        <p:style>
-          <a:lnRef idx="1">
-            <a:schemeClr val="accent1"/>
-          </a:lnRef>
-          <a:fillRef idx="3">
-            <a:schemeClr val="accent1"/>
-          </a:fillRef>
-          <a:effectRef idx="2">
-            <a:schemeClr val="accent1"/>
-          </a:effectRef>
-          <a:fontRef idx="minor">
-            <a:schemeClr val="lt1"/>
-          </a:fontRef>
-        </p:style>
-        <p:txBody>
-          <a:bodyPr rtlCol="0" anchor="ctr"/>
-          <a:lstStyle/>
-          <a:p>
-            <a:pPr algn="ctr"/>
-            <a:endParaRPr/>
-          </a:p>
-        </p:txBody>
-      </p:sp>
-      <p:sp>
-        <p:nvSpPr>
           <p:cNvPr id="4" name="TextBox 3"/>
           <p:cNvSpPr txBox="1"/>
           <p:nvPr/>
@@ -8299,7 +8775,15 @@
             </a:r>
             <a:r>
               <a:rPr dirty="0"/>
-              <a:t> 0~4 · </a:t>
+              <a:t> 0~4 </a:t>
+            </a:r>
+            <a:r>
+              <a:rPr lang="en-US" altLang="ko-KR" dirty="0"/>
+              <a:t>/</a:t>
+            </a:r>
+            <a:r>
+              <a:rPr dirty="0"/>
+              <a:t> </a:t>
             </a:r>
             <a:r>
               <a:rPr dirty="0" err="1"/>
@@ -8315,7 +8799,15 @@
             </a:r>
             <a:r>
               <a:rPr dirty="0"/>
-              <a:t> 0~2 · </a:t>
+              <a:t> 0~2 </a:t>
+            </a:r>
+            <a:r>
+              <a:rPr lang="en-US" altLang="ko-KR" dirty="0"/>
+              <a:t>/</a:t>
+            </a:r>
+            <a:r>
+              <a:rPr dirty="0"/>
+              <a:t> </a:t>
             </a:r>
             <a:r>
               <a:rPr dirty="0" err="1"/>
@@ -8331,7 +8823,15 @@
             </a:r>
             <a:r>
               <a:rPr dirty="0"/>
-              <a:t> 0~2 · </a:t>
+              <a:t> 0~2 </a:t>
+            </a:r>
+            <a:r>
+              <a:rPr lang="en-US" altLang="ko-KR" dirty="0"/>
+              <a:t>/</a:t>
+            </a:r>
+            <a:r>
+              <a:rPr dirty="0"/>
+              <a:t> </a:t>
             </a:r>
             <a:r>
               <a:rPr dirty="0" err="1"/>
@@ -8811,15 +9311,165 @@
           </a:p>
         </p:txBody>
       </p:sp>
+      <p:pic>
+        <p:nvPicPr>
+          <p:cNvPr id="6" name="그림 5">
+            <a:extLst>
+              <a:ext uri="{FF2B5EF4-FFF2-40B4-BE49-F238E27FC236}">
+                <a16:creationId xmlns:a16="http://schemas.microsoft.com/office/drawing/2014/main" id="{8D0DCD07-963E-B345-3AB0-4A4F2026B379}"/>
+              </a:ext>
+            </a:extLst>
+          </p:cNvPr>
+          <p:cNvPicPr>
+            <a:picLocks noChangeAspect="1"/>
+          </p:cNvPicPr>
+          <p:nvPr/>
+        </p:nvPicPr>
+        <p:blipFill>
+          <a:blip r:embed="rId2"/>
+          <a:stretch>
+            <a:fillRect/>
+          </a:stretch>
+        </p:blipFill>
+        <p:spPr>
+          <a:xfrm>
+            <a:off x="385178" y="1882378"/>
+            <a:ext cx="8373644" cy="3610479"/>
+          </a:xfrm>
+          <a:prstGeom prst="rect">
+            <a:avLst/>
+          </a:prstGeom>
+        </p:spPr>
+      </p:pic>
     </p:spTree>
   </p:cSld>
   <p:clrMapOvr>
     <a:masterClrMapping/>
   </p:clrMapOvr>
+  <p:timing>
+    <p:tnLst>
+      <p:par>
+        <p:cTn id="1" dur="indefinite" restart="never" nodeType="tmRoot">
+          <p:childTnLst>
+            <p:seq concurrent="1" nextAc="seek">
+              <p:cTn id="2" dur="indefinite" nodeType="mainSeq">
+                <p:childTnLst>
+                  <p:par>
+                    <p:cTn id="3" fill="hold">
+                      <p:stCondLst>
+                        <p:cond delay="indefinite"/>
+                      </p:stCondLst>
+                      <p:childTnLst>
+                        <p:par>
+                          <p:cTn id="4" fill="hold">
+                            <p:stCondLst>
+                              <p:cond delay="0"/>
+                            </p:stCondLst>
+                            <p:childTnLst>
+                              <p:par>
+                                <p:cTn id="5" presetID="1" presetClass="entr" presetSubtype="0" fill="hold" nodeType="clickEffect">
+                                  <p:stCondLst>
+                                    <p:cond delay="0"/>
+                                  </p:stCondLst>
+                                  <p:childTnLst>
+                                    <p:set>
+                                      <p:cBhvr>
+                                        <p:cTn id="6" dur="1" fill="hold">
+                                          <p:stCondLst>
+                                            <p:cond delay="0"/>
+                                          </p:stCondLst>
+                                        </p:cTn>
+                                        <p:tgtEl>
+                                          <p:spTgt spid="6"/>
+                                        </p:tgtEl>
+                                        <p:attrNameLst>
+                                          <p:attrName>style.visibility</p:attrName>
+                                        </p:attrNameLst>
+                                      </p:cBhvr>
+                                      <p:to>
+                                        <p:strVal val="visible"/>
+                                      </p:to>
+                                    </p:set>
+                                  </p:childTnLst>
+                                </p:cTn>
+                              </p:par>
+                            </p:childTnLst>
+                          </p:cTn>
+                        </p:par>
+                      </p:childTnLst>
+                    </p:cTn>
+                  </p:par>
+                  <p:par>
+                    <p:cTn id="7" fill="hold">
+                      <p:stCondLst>
+                        <p:cond delay="indefinite"/>
+                      </p:stCondLst>
+                      <p:childTnLst>
+                        <p:par>
+                          <p:cTn id="8" fill="hold">
+                            <p:stCondLst>
+                              <p:cond delay="0"/>
+                            </p:stCondLst>
+                            <p:childTnLst>
+                              <p:par>
+                                <p:cTn id="9" presetID="1" presetClass="exit" presetSubtype="0" fill="hold" nodeType="clickEffect">
+                                  <p:stCondLst>
+                                    <p:cond delay="0"/>
+                                  </p:stCondLst>
+                                  <p:childTnLst>
+                                    <p:set>
+                                      <p:cBhvr>
+                                        <p:cTn id="10" dur="1" fill="hold">
+                                          <p:stCondLst>
+                                            <p:cond delay="0"/>
+                                          </p:stCondLst>
+                                        </p:cTn>
+                                        <p:tgtEl>
+                                          <p:spTgt spid="6"/>
+                                        </p:tgtEl>
+                                        <p:attrNameLst>
+                                          <p:attrName>style.visibility</p:attrName>
+                                        </p:attrNameLst>
+                                      </p:cBhvr>
+                                      <p:to>
+                                        <p:strVal val="hidden"/>
+                                      </p:to>
+                                    </p:set>
+                                  </p:childTnLst>
+                                </p:cTn>
+                              </p:par>
+                            </p:childTnLst>
+                          </p:cTn>
+                        </p:par>
+                      </p:childTnLst>
+                    </p:cTn>
+                  </p:par>
+                </p:childTnLst>
+              </p:cTn>
+              <p:prevCondLst>
+                <p:cond evt="onPrev" delay="0">
+                  <p:tgtEl>
+                    <p:sldTgt/>
+                  </p:tgtEl>
+                </p:cond>
+              </p:prevCondLst>
+              <p:nextCondLst>
+                <p:cond evt="onNext" delay="0">
+                  <p:tgtEl>
+                    <p:sldTgt/>
+                  </p:tgtEl>
+                </p:cond>
+              </p:nextCondLst>
+            </p:seq>
+          </p:childTnLst>
+        </p:cTn>
+      </p:par>
+    </p:tnLst>
+  </p:timing>
 </p:sld>
 </file>
 
-<file path=ppt/slides/slide21.xml><?xml version="1.0" encoding="utf-8"?>
+<file path=ppt/slides/slide22.xml><?xml version="1.0" encoding="utf-8"?>
 <p:sld xmlns:a="http://schemas.openxmlformats.org/drawingml/2006/main" xmlns:r="http://schemas.openxmlformats.org/officeDocument/2006/relationships" xmlns:p="http://schemas.openxmlformats.org/presentationml/2006/main">
   <p:cSld>
     <p:spTree>
@@ -8951,7 +9601,7 @@
 </p:sld>
 </file>
 
-<file path=ppt/slides/slide22.xml><?xml version="1.0" encoding="utf-8"?>
+<file path=ppt/slides/slide23.xml><?xml version="1.0" encoding="utf-8"?>
 <p:sld xmlns:a="http://schemas.openxmlformats.org/drawingml/2006/main" xmlns:r="http://schemas.openxmlformats.org/officeDocument/2006/relationships" xmlns:p="http://schemas.openxmlformats.org/presentationml/2006/main">
   <p:cSld>
     <p:spTree>
@@ -9111,7 +9761,7 @@
 </p:sld>
 </file>
 
-<file path=ppt/slides/slide23.xml><?xml version="1.0" encoding="utf-8"?>
+<file path=ppt/slides/slide24.xml><?xml version="1.0" encoding="utf-8"?>
 <p:sld xmlns:a="http://schemas.openxmlformats.org/drawingml/2006/main" xmlns:r="http://schemas.openxmlformats.org/officeDocument/2006/relationships" xmlns:p="http://schemas.openxmlformats.org/presentationml/2006/main">
   <p:cSld>
     <p:spTree>
@@ -9621,7 +10271,7 @@
 </p:sld>
 </file>
 
-<file path=ppt/slides/slide24.xml><?xml version="1.0" encoding="utf-8"?>
+<file path=ppt/slides/slide25.xml><?xml version="1.0" encoding="utf-8"?>
 <p:sld xmlns:a="http://schemas.openxmlformats.org/drawingml/2006/main" xmlns:r="http://schemas.openxmlformats.org/officeDocument/2006/relationships" xmlns:p="http://schemas.openxmlformats.org/presentationml/2006/main">
   <p:cSld>
     <p:spTree>
@@ -10217,7 +10867,7 @@
 </p:sld>
 </file>
 
-<file path=ppt/slides/slide25.xml><?xml version="1.0" encoding="utf-8"?>
+<file path=ppt/slides/slide26.xml><?xml version="1.0" encoding="utf-8"?>
 <p:sld xmlns:a="http://schemas.openxmlformats.org/drawingml/2006/main" xmlns:r="http://schemas.openxmlformats.org/officeDocument/2006/relationships" xmlns:p="http://schemas.openxmlformats.org/presentationml/2006/main">
   <p:cSld>
     <p:spTree>
@@ -10279,6 +10929,22 @@
             <a:r>
               <a:rPr dirty="0" err="1"/>
               <a:t>비교</a:t>
+            </a:r>
+            <a:r>
+              <a:rPr lang="en-US" dirty="0"/>
+              <a:t> </a:t>
+            </a:r>
+            <a:r>
+              <a:rPr lang="en-US" altLang="ko-KR" dirty="0"/>
+              <a:t>(</a:t>
+            </a:r>
+            <a:r>
+              <a:rPr lang="ko-KR" altLang="en-US" dirty="0"/>
+              <a:t>정량적</a:t>
+            </a:r>
+            <a:r>
+              <a:rPr lang="en-US" altLang="ko-KR" dirty="0"/>
+              <a:t>)</a:t>
             </a:r>
             <a:endParaRPr dirty="0"/>
           </a:p>
@@ -10512,7 +11178,7 @@
             </a:r>
             <a:r>
               <a:rPr lang="en-US" altLang="ko-KR" dirty="0"/>
-              <a:t>+</a:t>
+              <a:t>-</a:t>
             </a:r>
             <a:r>
               <a:rPr dirty="0"/>
@@ -10751,6 +11417,564 @@
         </p:txBody>
       </p:sp>
     </p:spTree>
+  </p:cSld>
+  <p:clrMapOvr>
+    <a:masterClrMapping/>
+  </p:clrMapOvr>
+</p:sld>
+</file>
+
+<file path=ppt/slides/slide27.xml><?xml version="1.0" encoding="utf-8"?>
+<p:sld xmlns:a="http://schemas.openxmlformats.org/drawingml/2006/main" xmlns:r="http://schemas.openxmlformats.org/officeDocument/2006/relationships" xmlns:p="http://schemas.openxmlformats.org/presentationml/2006/main">
+  <p:cSld>
+    <p:spTree>
+      <p:nvGrpSpPr>
+        <p:cNvPr id="1" name=""/>
+        <p:cNvGrpSpPr/>
+        <p:nvPr/>
+      </p:nvGrpSpPr>
+      <p:grpSpPr>
+        <a:xfrm>
+          <a:off x="0" y="0"/>
+          <a:ext cx="0" cy="0"/>
+          <a:chOff x="0" y="0"/>
+          <a:chExt cx="0" cy="0"/>
+        </a:xfrm>
+      </p:grpSpPr>
+      <p:sp>
+        <p:nvSpPr>
+          <p:cNvPr id="2" name="Title 1"/>
+          <p:cNvSpPr>
+            <a:spLocks noGrp="1"/>
+          </p:cNvSpPr>
+          <p:nvPr>
+            <p:ph type="title"/>
+          </p:nvPr>
+        </p:nvSpPr>
+        <p:spPr/>
+        <p:txBody>
+          <a:bodyPr/>
+          <a:lstStyle/>
+          <a:p>
+            <a:pPr>
+              <a:defRPr sz="2800" b="1">
+                <a:solidFill>
+                  <a:srgbClr val="142A4F"/>
+                </a:solidFill>
+              </a:defRPr>
+            </a:pPr>
+            <a:r>
+              <a:rPr dirty="0"/>
+              <a:t>4-4. </a:t>
+            </a:r>
+            <a:r>
+              <a:rPr lang="en-US" altLang="ko-KR" dirty="0"/>
+              <a:t>Org. vs </a:t>
+            </a:r>
+            <a:r>
+              <a:rPr dirty="0"/>
+              <a:t>BM25 </a:t>
+            </a:r>
+            <a:r>
+              <a:rPr dirty="0" err="1"/>
+              <a:t>제거</a:t>
+            </a:r>
+            <a:r>
+              <a:rPr dirty="0"/>
+              <a:t> </a:t>
+            </a:r>
+            <a:r>
+              <a:rPr dirty="0" err="1"/>
+              <a:t>비교</a:t>
+            </a:r>
+            <a:r>
+              <a:rPr lang="en-US" dirty="0"/>
+              <a:t> </a:t>
+            </a:r>
+            <a:r>
+              <a:rPr lang="en-US" altLang="ko-KR" dirty="0"/>
+              <a:t>(</a:t>
+            </a:r>
+            <a:r>
+              <a:rPr lang="ko-KR" altLang="en-US" dirty="0"/>
+              <a:t>정성적</a:t>
+            </a:r>
+            <a:r>
+              <a:rPr lang="en-US" altLang="ko-KR" dirty="0"/>
+              <a:t>)</a:t>
+            </a:r>
+            <a:endParaRPr dirty="0"/>
+          </a:p>
+        </p:txBody>
+      </p:sp>
+      <p:sp>
+        <p:nvSpPr>
+          <p:cNvPr id="3" name="Rectangle 2"/>
+          <p:cNvSpPr/>
+          <p:nvPr/>
+        </p:nvSpPr>
+        <p:spPr>
+          <a:xfrm>
+            <a:off x="548640" y="1234440"/>
+            <a:ext cx="8229600" cy="45720"/>
+          </a:xfrm>
+          <a:prstGeom prst="rect">
+            <a:avLst/>
+          </a:prstGeom>
+          <a:solidFill>
+            <a:srgbClr val="1F77B4"/>
+          </a:solidFill>
+          <a:ln>
+            <a:noFill/>
+          </a:ln>
+        </p:spPr>
+        <p:style>
+          <a:lnRef idx="1">
+            <a:schemeClr val="accent1"/>
+          </a:lnRef>
+          <a:fillRef idx="3">
+            <a:schemeClr val="accent1"/>
+          </a:fillRef>
+          <a:effectRef idx="2">
+            <a:schemeClr val="accent1"/>
+          </a:effectRef>
+          <a:fontRef idx="minor">
+            <a:schemeClr val="lt1"/>
+          </a:fontRef>
+        </p:style>
+        <p:txBody>
+          <a:bodyPr rtlCol="0" anchor="ctr"/>
+          <a:lstStyle/>
+          <a:p>
+            <a:pPr algn="ctr"/>
+            <a:endParaRPr/>
+          </a:p>
+        </p:txBody>
+      </p:sp>
+      <p:sp>
+        <p:nvSpPr>
+          <p:cNvPr id="17" name="TextBox 16">
+            <a:extLst>
+              <a:ext uri="{FF2B5EF4-FFF2-40B4-BE49-F238E27FC236}">
+                <a16:creationId xmlns:a16="http://schemas.microsoft.com/office/drawing/2014/main" id="{2758684F-E871-8E5F-68AD-9ACAAD02B914}"/>
+              </a:ext>
+            </a:extLst>
+          </p:cNvPr>
+          <p:cNvSpPr txBox="1"/>
+          <p:nvPr/>
+        </p:nvSpPr>
+        <p:spPr>
+          <a:xfrm>
+            <a:off x="1872761" y="1876342"/>
+            <a:ext cx="1308793" cy="382092"/>
+          </a:xfrm>
+          <a:prstGeom prst="rect">
+            <a:avLst/>
+          </a:prstGeom>
+          <a:noFill/>
+        </p:spPr>
+        <p:txBody>
+          <a:bodyPr wrap="square">
+            <a:spAutoFit/>
+          </a:bodyPr>
+          <a:lstStyle/>
+          <a:p>
+            <a:pPr algn="ctr">
+              <a:lnSpc>
+                <a:spcPct val="150000"/>
+              </a:lnSpc>
+              <a:spcAft>
+                <a:spcPts val="400"/>
+              </a:spcAft>
+              <a:defRPr sz="1300">
+                <a:solidFill>
+                  <a:srgbClr val="444444"/>
+                </a:solidFill>
+              </a:defRPr>
+            </a:pPr>
+            <a:r>
+              <a:rPr lang="en-US" altLang="ko-KR" sz="1400" b="1" dirty="0"/>
+              <a:t>Original Code</a:t>
+            </a:r>
+            <a:endParaRPr lang="en-US" sz="1400" b="1" dirty="0"/>
+          </a:p>
+        </p:txBody>
+      </p:sp>
+      <p:sp>
+        <p:nvSpPr>
+          <p:cNvPr id="18" name="TextBox 17">
+            <a:extLst>
+              <a:ext uri="{FF2B5EF4-FFF2-40B4-BE49-F238E27FC236}">
+                <a16:creationId xmlns:a16="http://schemas.microsoft.com/office/drawing/2014/main" id="{C999AABE-3F35-7757-8FD4-6D405CDF227B}"/>
+              </a:ext>
+            </a:extLst>
+          </p:cNvPr>
+          <p:cNvSpPr txBox="1"/>
+          <p:nvPr/>
+        </p:nvSpPr>
+        <p:spPr>
+          <a:xfrm>
+            <a:off x="5916577" y="1876342"/>
+            <a:ext cx="1308793" cy="382092"/>
+          </a:xfrm>
+          <a:prstGeom prst="rect">
+            <a:avLst/>
+          </a:prstGeom>
+          <a:noFill/>
+        </p:spPr>
+        <p:txBody>
+          <a:bodyPr wrap="square">
+            <a:spAutoFit/>
+          </a:bodyPr>
+          <a:lstStyle/>
+          <a:p>
+            <a:pPr algn="ctr">
+              <a:lnSpc>
+                <a:spcPct val="150000"/>
+              </a:lnSpc>
+              <a:spcAft>
+                <a:spcPts val="400"/>
+              </a:spcAft>
+              <a:defRPr sz="1300">
+                <a:solidFill>
+                  <a:srgbClr val="444444"/>
+                </a:solidFill>
+              </a:defRPr>
+            </a:pPr>
+            <a:r>
+              <a:rPr lang="en-US" altLang="ko-KR" sz="1400" b="1" dirty="0"/>
+              <a:t>BM25 </a:t>
+            </a:r>
+            <a:r>
+              <a:rPr lang="ko-KR" altLang="en-US" sz="1400" b="1" dirty="0"/>
+              <a:t>제거 후</a:t>
+            </a:r>
+            <a:endParaRPr lang="en-US" sz="1400" b="1" dirty="0"/>
+          </a:p>
+        </p:txBody>
+      </p:sp>
+      <p:pic>
+        <p:nvPicPr>
+          <p:cNvPr id="5" name="그림 4">
+            <a:extLst>
+              <a:ext uri="{FF2B5EF4-FFF2-40B4-BE49-F238E27FC236}">
+                <a16:creationId xmlns:a16="http://schemas.microsoft.com/office/drawing/2014/main" id="{AB372AF5-35BB-B67C-4E13-FF98303C3C01}"/>
+              </a:ext>
+            </a:extLst>
+          </p:cNvPr>
+          <p:cNvPicPr>
+            <a:picLocks noChangeAspect="1"/>
+          </p:cNvPicPr>
+          <p:nvPr/>
+        </p:nvPicPr>
+        <p:blipFill>
+          <a:blip r:embed="rId2"/>
+          <a:stretch>
+            <a:fillRect/>
+          </a:stretch>
+        </p:blipFill>
+        <p:spPr>
+          <a:xfrm>
+            <a:off x="220435" y="2341416"/>
+            <a:ext cx="8703132" cy="3228112"/>
+          </a:xfrm>
+          <a:prstGeom prst="rect">
+            <a:avLst/>
+          </a:prstGeom>
+        </p:spPr>
+      </p:pic>
+    </p:spTree>
+    <p:extLst>
+      <p:ext uri="{BB962C8B-B14F-4D97-AF65-F5344CB8AC3E}">
+        <p14:creationId xmlns:p14="http://schemas.microsoft.com/office/powerpoint/2010/main" val="267884629"/>
+      </p:ext>
+    </p:extLst>
+  </p:cSld>
+  <p:clrMapOvr>
+    <a:masterClrMapping/>
+  </p:clrMapOvr>
+</p:sld>
+</file>
+
+<file path=ppt/slides/slide28.xml><?xml version="1.0" encoding="utf-8"?>
+<p:sld xmlns:a="http://schemas.openxmlformats.org/drawingml/2006/main" xmlns:r="http://schemas.openxmlformats.org/officeDocument/2006/relationships" xmlns:p="http://schemas.openxmlformats.org/presentationml/2006/main">
+  <p:cSld>
+    <p:spTree>
+      <p:nvGrpSpPr>
+        <p:cNvPr id="1" name=""/>
+        <p:cNvGrpSpPr/>
+        <p:nvPr/>
+      </p:nvGrpSpPr>
+      <p:grpSpPr>
+        <a:xfrm>
+          <a:off x="0" y="0"/>
+          <a:ext cx="0" cy="0"/>
+          <a:chOff x="0" y="0"/>
+          <a:chExt cx="0" cy="0"/>
+        </a:xfrm>
+      </p:grpSpPr>
+      <p:sp>
+        <p:nvSpPr>
+          <p:cNvPr id="2" name="Title 1"/>
+          <p:cNvSpPr>
+            <a:spLocks noGrp="1"/>
+          </p:cNvSpPr>
+          <p:nvPr>
+            <p:ph type="title"/>
+          </p:nvPr>
+        </p:nvSpPr>
+        <p:spPr/>
+        <p:txBody>
+          <a:bodyPr/>
+          <a:lstStyle/>
+          <a:p>
+            <a:pPr>
+              <a:defRPr sz="2800" b="1">
+                <a:solidFill>
+                  <a:srgbClr val="142A4F"/>
+                </a:solidFill>
+              </a:defRPr>
+            </a:pPr>
+            <a:r>
+              <a:rPr lang="en-US" altLang="ko-KR" dirty="0"/>
+              <a:t>Appendix. Trial &amp; Error</a:t>
+            </a:r>
+            <a:endParaRPr dirty="0"/>
+          </a:p>
+        </p:txBody>
+      </p:sp>
+      <p:sp>
+        <p:nvSpPr>
+          <p:cNvPr id="3" name="Rectangle 2"/>
+          <p:cNvSpPr/>
+          <p:nvPr/>
+        </p:nvSpPr>
+        <p:spPr>
+          <a:xfrm>
+            <a:off x="548640" y="1234440"/>
+            <a:ext cx="8229600" cy="45720"/>
+          </a:xfrm>
+          <a:prstGeom prst="rect">
+            <a:avLst/>
+          </a:prstGeom>
+          <a:solidFill>
+            <a:srgbClr val="1F77B4"/>
+          </a:solidFill>
+          <a:ln>
+            <a:noFill/>
+          </a:ln>
+        </p:spPr>
+        <p:style>
+          <a:lnRef idx="1">
+            <a:schemeClr val="accent1"/>
+          </a:lnRef>
+          <a:fillRef idx="3">
+            <a:schemeClr val="accent1"/>
+          </a:fillRef>
+          <a:effectRef idx="2">
+            <a:schemeClr val="accent1"/>
+          </a:effectRef>
+          <a:fontRef idx="minor">
+            <a:schemeClr val="lt1"/>
+          </a:fontRef>
+        </p:style>
+        <p:txBody>
+          <a:bodyPr rtlCol="0" anchor="ctr"/>
+          <a:lstStyle/>
+          <a:p>
+            <a:pPr algn="ctr"/>
+            <a:endParaRPr/>
+          </a:p>
+        </p:txBody>
+      </p:sp>
+      <p:pic>
+        <p:nvPicPr>
+          <p:cNvPr id="6" name="그림 5">
+            <a:extLst>
+              <a:ext uri="{FF2B5EF4-FFF2-40B4-BE49-F238E27FC236}">
+                <a16:creationId xmlns:a16="http://schemas.microsoft.com/office/drawing/2014/main" id="{F345C93D-4952-3C55-9C76-3BCF6F316DBB}"/>
+              </a:ext>
+            </a:extLst>
+          </p:cNvPr>
+          <p:cNvPicPr>
+            <a:picLocks noChangeAspect="1"/>
+          </p:cNvPicPr>
+          <p:nvPr/>
+        </p:nvPicPr>
+        <p:blipFill>
+          <a:blip r:embed="rId2"/>
+          <a:stretch>
+            <a:fillRect/>
+          </a:stretch>
+        </p:blipFill>
+        <p:spPr>
+          <a:xfrm>
+            <a:off x="548640" y="1700185"/>
+            <a:ext cx="6018615" cy="4307376"/>
+          </a:xfrm>
+          <a:prstGeom prst="rect">
+            <a:avLst/>
+          </a:prstGeom>
+        </p:spPr>
+      </p:pic>
+    </p:spTree>
+    <p:extLst>
+      <p:ext uri="{BB962C8B-B14F-4D97-AF65-F5344CB8AC3E}">
+        <p14:creationId xmlns:p14="http://schemas.microsoft.com/office/powerpoint/2010/main" val="2091935484"/>
+      </p:ext>
+    </p:extLst>
+  </p:cSld>
+  <p:clrMapOvr>
+    <a:masterClrMapping/>
+  </p:clrMapOvr>
+</p:sld>
+</file>
+
+<file path=ppt/slides/slide29.xml><?xml version="1.0" encoding="utf-8"?>
+<p:sld xmlns:a="http://schemas.openxmlformats.org/drawingml/2006/main" xmlns:r="http://schemas.openxmlformats.org/officeDocument/2006/relationships" xmlns:p="http://schemas.openxmlformats.org/presentationml/2006/main">
+  <p:cSld>
+    <p:spTree>
+      <p:nvGrpSpPr>
+        <p:cNvPr id="1" name="">
+          <a:extLst>
+            <a:ext uri="{FF2B5EF4-FFF2-40B4-BE49-F238E27FC236}">
+              <a16:creationId xmlns:a16="http://schemas.microsoft.com/office/drawing/2014/main" id="{0B693276-0463-8FED-3A8D-5A96911300D7}"/>
+            </a:ext>
+          </a:extLst>
+        </p:cNvPr>
+        <p:cNvGrpSpPr/>
+        <p:nvPr/>
+      </p:nvGrpSpPr>
+      <p:grpSpPr>
+        <a:xfrm>
+          <a:off x="0" y="0"/>
+          <a:ext cx="0" cy="0"/>
+          <a:chOff x="0" y="0"/>
+          <a:chExt cx="0" cy="0"/>
+        </a:xfrm>
+      </p:grpSpPr>
+      <p:sp>
+        <p:nvSpPr>
+          <p:cNvPr id="2" name="Title 1">
+            <a:extLst>
+              <a:ext uri="{FF2B5EF4-FFF2-40B4-BE49-F238E27FC236}">
+                <a16:creationId xmlns:a16="http://schemas.microsoft.com/office/drawing/2014/main" id="{1FF45A37-2DF6-20EF-D076-BADB9659CEFB}"/>
+              </a:ext>
+            </a:extLst>
+          </p:cNvPr>
+          <p:cNvSpPr>
+            <a:spLocks noGrp="1"/>
+          </p:cNvSpPr>
+          <p:nvPr>
+            <p:ph type="title"/>
+          </p:nvPr>
+        </p:nvSpPr>
+        <p:spPr/>
+        <p:txBody>
+          <a:bodyPr/>
+          <a:lstStyle/>
+          <a:p>
+            <a:pPr>
+              <a:defRPr sz="2800" b="1">
+                <a:solidFill>
+                  <a:srgbClr val="142A4F"/>
+                </a:solidFill>
+              </a:defRPr>
+            </a:pPr>
+            <a:r>
+              <a:rPr lang="en-US" altLang="ko-KR" dirty="0"/>
+              <a:t>Appendix. Trial &amp; Error</a:t>
+            </a:r>
+            <a:endParaRPr dirty="0"/>
+          </a:p>
+        </p:txBody>
+      </p:sp>
+      <p:sp>
+        <p:nvSpPr>
+          <p:cNvPr id="3" name="Rectangle 2">
+            <a:extLst>
+              <a:ext uri="{FF2B5EF4-FFF2-40B4-BE49-F238E27FC236}">
+                <a16:creationId xmlns:a16="http://schemas.microsoft.com/office/drawing/2014/main" id="{CC20A85E-7402-01C0-5E31-9CC96B109959}"/>
+              </a:ext>
+            </a:extLst>
+          </p:cNvPr>
+          <p:cNvSpPr/>
+          <p:nvPr/>
+        </p:nvSpPr>
+        <p:spPr>
+          <a:xfrm>
+            <a:off x="548640" y="1234440"/>
+            <a:ext cx="8229600" cy="45720"/>
+          </a:xfrm>
+          <a:prstGeom prst="rect">
+            <a:avLst/>
+          </a:prstGeom>
+          <a:solidFill>
+            <a:srgbClr val="1F77B4"/>
+          </a:solidFill>
+          <a:ln>
+            <a:noFill/>
+          </a:ln>
+        </p:spPr>
+        <p:style>
+          <a:lnRef idx="1">
+            <a:schemeClr val="accent1"/>
+          </a:lnRef>
+          <a:fillRef idx="3">
+            <a:schemeClr val="accent1"/>
+          </a:fillRef>
+          <a:effectRef idx="2">
+            <a:schemeClr val="accent1"/>
+          </a:effectRef>
+          <a:fontRef idx="minor">
+            <a:schemeClr val="lt1"/>
+          </a:fontRef>
+        </p:style>
+        <p:txBody>
+          <a:bodyPr rtlCol="0" anchor="ctr"/>
+          <a:lstStyle/>
+          <a:p>
+            <a:pPr algn="ctr"/>
+            <a:endParaRPr/>
+          </a:p>
+        </p:txBody>
+      </p:sp>
+      <p:pic>
+        <p:nvPicPr>
+          <p:cNvPr id="5" name="Picture 2" descr="simple_lang1_agent_flow.png">
+            <a:extLst>
+              <a:ext uri="{FF2B5EF4-FFF2-40B4-BE49-F238E27FC236}">
+                <a16:creationId xmlns:a16="http://schemas.microsoft.com/office/drawing/2014/main" id="{3B720ABA-C7AB-1269-7445-AA73956D1365}"/>
+              </a:ext>
+            </a:extLst>
+          </p:cNvPr>
+          <p:cNvPicPr>
+            <a:picLocks noChangeAspect="1"/>
+          </p:cNvPicPr>
+          <p:nvPr/>
+        </p:nvPicPr>
+        <p:blipFill>
+          <a:blip r:embed="rId2"/>
+          <a:stretch>
+            <a:fillRect/>
+          </a:stretch>
+        </p:blipFill>
+        <p:spPr>
+          <a:xfrm>
+            <a:off x="831273" y="1438102"/>
+            <a:ext cx="7481455" cy="4987636"/>
+          </a:xfrm>
+          <a:prstGeom prst="rect">
+            <a:avLst/>
+          </a:prstGeom>
+        </p:spPr>
+      </p:pic>
+    </p:spTree>
+    <p:extLst>
+      <p:ext uri="{BB962C8B-B14F-4D97-AF65-F5344CB8AC3E}">
+        <p14:creationId xmlns:p14="http://schemas.microsoft.com/office/powerpoint/2010/main" val="897461783"/>
+      </p:ext>
+    </p:extLst>
   </p:cSld>
   <p:clrMapOvr>
     <a:masterClrMapping/>
@@ -10841,8 +12065,10 @@
               </a:defRPr>
             </a:pPr>
             <a:r>
+              <a:rPr dirty="0" err="1"/>
               <a:t>개요</a:t>
             </a:r>
+            <a:endParaRPr dirty="0"/>
           </a:p>
           <a:p>
             <a:pPr>
@@ -10853,8 +12079,34 @@
               </a:defRPr>
             </a:pPr>
             <a:r>
-              <a:t>무엇을, 왜, 얼마나 믿을 수 있는가</a:t>
-            </a:r>
+              <a:rPr dirty="0" err="1"/>
+              <a:t>무엇을</a:t>
+            </a:r>
+            <a:r>
+              <a:rPr dirty="0"/>
+              <a:t>, 왜, </a:t>
+            </a:r>
+            <a:r>
+              <a:rPr dirty="0" err="1"/>
+              <a:t>얼마나</a:t>
+            </a:r>
+            <a:r>
+              <a:rPr dirty="0"/>
+              <a:t> </a:t>
+            </a:r>
+            <a:r>
+              <a:rPr dirty="0" err="1"/>
+              <a:t>믿을</a:t>
+            </a:r>
+            <a:r>
+              <a:rPr dirty="0"/>
+              <a:t> 수 </a:t>
+            </a:r>
+            <a:r>
+              <a:rPr dirty="0" err="1"/>
+              <a:t>있는가</a:t>
+            </a:r>
+            <a:endParaRPr dirty="0"/>
           </a:p>
         </p:txBody>
       </p:sp>
@@ -10866,7 +12118,7 @@
 </p:sld>
 </file>
 
-<file path=ppt/slides/slide4.xml><?xml version="1.0" encoding="utf-8"?>
+<file path=ppt/slides/slide30.xml><?xml version="1.0" encoding="utf-8"?>
 <p:sld xmlns:a="http://schemas.openxmlformats.org/drawingml/2006/main" xmlns:r="http://schemas.openxmlformats.org/officeDocument/2006/relationships" xmlns:p="http://schemas.openxmlformats.org/presentationml/2006/main">
   <p:cSld>
     <p:spTree>
@@ -10906,20 +12158,8 @@
               </a:defRPr>
             </a:pPr>
             <a:r>
-              <a:rPr dirty="0"/>
-              <a:t>1-1. 이 </a:t>
-            </a:r>
-            <a:r>
-              <a:rPr dirty="0" err="1"/>
-              <a:t>챗봇의</a:t>
-            </a:r>
-            <a:r>
-              <a:rPr dirty="0"/>
-              <a:t> </a:t>
-            </a:r>
-            <a:r>
-              <a:rPr dirty="0" err="1"/>
-              <a:t>목적</a:t>
+              <a:rPr lang="en-US" altLang="ko-KR" dirty="0"/>
+              <a:t>Appendix. Trial &amp; Error</a:t>
             </a:r>
             <a:endParaRPr dirty="0"/>
           </a:p>
@@ -10969,6 +12209,449 @@
           </a:p>
         </p:txBody>
       </p:sp>
+      <p:pic>
+        <p:nvPicPr>
+          <p:cNvPr id="10" name="그림 9">
+            <a:extLst>
+              <a:ext uri="{FF2B5EF4-FFF2-40B4-BE49-F238E27FC236}">
+                <a16:creationId xmlns:a16="http://schemas.microsoft.com/office/drawing/2014/main" id="{FE7B0A9D-9DE7-9A75-481F-086B889A1D67}"/>
+              </a:ext>
+            </a:extLst>
+          </p:cNvPr>
+          <p:cNvPicPr>
+            <a:picLocks noChangeAspect="1"/>
+          </p:cNvPicPr>
+          <p:nvPr/>
+        </p:nvPicPr>
+        <p:blipFill>
+          <a:blip r:embed="rId2"/>
+          <a:stretch>
+            <a:fillRect/>
+          </a:stretch>
+        </p:blipFill>
+        <p:spPr>
+          <a:xfrm>
+            <a:off x="419331" y="1604184"/>
+            <a:ext cx="4097125" cy="4684105"/>
+          </a:xfrm>
+          <a:prstGeom prst="rect">
+            <a:avLst/>
+          </a:prstGeom>
+        </p:spPr>
+      </p:pic>
+      <p:pic>
+        <p:nvPicPr>
+          <p:cNvPr id="12" name="그림 11">
+            <a:extLst>
+              <a:ext uri="{FF2B5EF4-FFF2-40B4-BE49-F238E27FC236}">
+                <a16:creationId xmlns:a16="http://schemas.microsoft.com/office/drawing/2014/main" id="{FF3B53C4-4FAE-8AD2-CF39-6E66C21D2C1F}"/>
+              </a:ext>
+            </a:extLst>
+          </p:cNvPr>
+          <p:cNvPicPr>
+            <a:picLocks noChangeAspect="1"/>
+          </p:cNvPicPr>
+          <p:nvPr/>
+        </p:nvPicPr>
+        <p:blipFill>
+          <a:blip r:embed="rId3"/>
+          <a:stretch>
+            <a:fillRect/>
+          </a:stretch>
+        </p:blipFill>
+        <p:spPr>
+          <a:xfrm>
+            <a:off x="4640350" y="1604184"/>
+            <a:ext cx="4097125" cy="2079508"/>
+          </a:xfrm>
+          <a:prstGeom prst="rect">
+            <a:avLst/>
+          </a:prstGeom>
+        </p:spPr>
+      </p:pic>
+      <p:pic>
+        <p:nvPicPr>
+          <p:cNvPr id="14" name="그림 13">
+            <a:extLst>
+              <a:ext uri="{FF2B5EF4-FFF2-40B4-BE49-F238E27FC236}">
+                <a16:creationId xmlns:a16="http://schemas.microsoft.com/office/drawing/2014/main" id="{CB34E457-ED01-994B-EBC5-0278EAD09F19}"/>
+              </a:ext>
+            </a:extLst>
+          </p:cNvPr>
+          <p:cNvPicPr>
+            <a:picLocks noChangeAspect="1"/>
+          </p:cNvPicPr>
+          <p:nvPr/>
+        </p:nvPicPr>
+        <p:blipFill>
+          <a:blip r:embed="rId4"/>
+          <a:stretch>
+            <a:fillRect/>
+          </a:stretch>
+        </p:blipFill>
+        <p:spPr>
+          <a:xfrm>
+            <a:off x="5138718" y="2736111"/>
+            <a:ext cx="3100387" cy="2996464"/>
+          </a:xfrm>
+          <a:prstGeom prst="rect">
+            <a:avLst/>
+          </a:prstGeom>
+        </p:spPr>
+      </p:pic>
+      <p:sp>
+        <p:nvSpPr>
+          <p:cNvPr id="15" name="TextBox 14">
+            <a:extLst>
+              <a:ext uri="{FF2B5EF4-FFF2-40B4-BE49-F238E27FC236}">
+                <a16:creationId xmlns:a16="http://schemas.microsoft.com/office/drawing/2014/main" id="{9EFAF229-8385-ADB7-BC51-997566DB5FA5}"/>
+              </a:ext>
+            </a:extLst>
+          </p:cNvPr>
+          <p:cNvSpPr txBox="1"/>
+          <p:nvPr/>
+        </p:nvSpPr>
+        <p:spPr>
+          <a:xfrm>
+            <a:off x="5761604" y="5903568"/>
+            <a:ext cx="1877437" cy="769441"/>
+          </a:xfrm>
+          <a:prstGeom prst="rect">
+            <a:avLst/>
+          </a:prstGeom>
+          <a:noFill/>
+        </p:spPr>
+        <p:txBody>
+          <a:bodyPr wrap="none" rtlCol="0">
+            <a:spAutoFit/>
+          </a:bodyPr>
+          <a:lstStyle/>
+          <a:p>
+            <a:r>
+              <a:rPr lang="ko-KR" altLang="en-US" sz="4400" dirty="0" err="1">
+                <a:solidFill>
+                  <a:srgbClr val="FF0000"/>
+                </a:solidFill>
+              </a:rPr>
+              <a:t>재계획</a:t>
+            </a:r>
+            <a:endParaRPr lang="ko-KR" altLang="en-US" sz="4400" dirty="0">
+              <a:solidFill>
+                <a:srgbClr val="FF0000"/>
+              </a:solidFill>
+            </a:endParaRPr>
+          </a:p>
+        </p:txBody>
+      </p:sp>
+      <p:sp>
+        <p:nvSpPr>
+          <p:cNvPr id="16" name="화살표: 오른쪽 15">
+            <a:extLst>
+              <a:ext uri="{FF2B5EF4-FFF2-40B4-BE49-F238E27FC236}">
+                <a16:creationId xmlns:a16="http://schemas.microsoft.com/office/drawing/2014/main" id="{EEADD394-D04C-250A-4503-4D347F07AAED}"/>
+              </a:ext>
+            </a:extLst>
+          </p:cNvPr>
+          <p:cNvSpPr/>
+          <p:nvPr/>
+        </p:nvSpPr>
+        <p:spPr>
+          <a:xfrm>
+            <a:off x="4829612" y="5988767"/>
+            <a:ext cx="822036" cy="496598"/>
+          </a:xfrm>
+          <a:prstGeom prst="rightArrow">
+            <a:avLst/>
+          </a:prstGeom>
+          <a:solidFill>
+            <a:schemeClr val="bg1"/>
+          </a:solidFill>
+          <a:ln>
+            <a:solidFill>
+              <a:srgbClr val="FF0000"/>
+            </a:solidFill>
+          </a:ln>
+        </p:spPr>
+        <p:style>
+          <a:lnRef idx="1">
+            <a:schemeClr val="accent1"/>
+          </a:lnRef>
+          <a:fillRef idx="3">
+            <a:schemeClr val="accent1"/>
+          </a:fillRef>
+          <a:effectRef idx="2">
+            <a:schemeClr val="accent1"/>
+          </a:effectRef>
+          <a:fontRef idx="minor">
+            <a:schemeClr val="lt1"/>
+          </a:fontRef>
+        </p:style>
+        <p:txBody>
+          <a:bodyPr rtlCol="0" anchor="ctr"/>
+          <a:lstStyle/>
+          <a:p>
+            <a:pPr algn="ctr"/>
+            <a:endParaRPr lang="ko-KR" altLang="en-US"/>
+          </a:p>
+        </p:txBody>
+      </p:sp>
+    </p:spTree>
+    <p:extLst>
+      <p:ext uri="{BB962C8B-B14F-4D97-AF65-F5344CB8AC3E}">
+        <p14:creationId xmlns:p14="http://schemas.microsoft.com/office/powerpoint/2010/main" val="324899194"/>
+      </p:ext>
+    </p:extLst>
+  </p:cSld>
+  <p:clrMapOvr>
+    <a:masterClrMapping/>
+  </p:clrMapOvr>
+</p:sld>
+</file>
+
+<file path=ppt/slides/slide4.xml><?xml version="1.0" encoding="utf-8"?>
+<p:sld xmlns:a="http://schemas.openxmlformats.org/drawingml/2006/main" xmlns:r="http://schemas.openxmlformats.org/officeDocument/2006/relationships" xmlns:p="http://schemas.openxmlformats.org/presentationml/2006/main">
+  <p:cSld>
+    <p:spTree>
+      <p:nvGrpSpPr>
+        <p:cNvPr id="1" name=""/>
+        <p:cNvGrpSpPr/>
+        <p:nvPr/>
+      </p:nvGrpSpPr>
+      <p:grpSpPr>
+        <a:xfrm>
+          <a:off x="0" y="0"/>
+          <a:ext cx="0" cy="0"/>
+          <a:chOff x="0" y="0"/>
+          <a:chExt cx="0" cy="0"/>
+        </a:xfrm>
+      </p:grpSpPr>
+      <p:sp>
+        <p:nvSpPr>
+          <p:cNvPr id="2" name="Title 1"/>
+          <p:cNvSpPr>
+            <a:spLocks noGrp="1"/>
+          </p:cNvSpPr>
+          <p:nvPr>
+            <p:ph type="title"/>
+          </p:nvPr>
+        </p:nvSpPr>
+        <p:spPr/>
+        <p:txBody>
+          <a:bodyPr/>
+          <a:lstStyle/>
+          <a:p>
+            <a:pPr>
+              <a:defRPr sz="2800" b="1">
+                <a:solidFill>
+                  <a:srgbClr val="142A4F"/>
+                </a:solidFill>
+              </a:defRPr>
+            </a:pPr>
+            <a:r>
+              <a:rPr dirty="0"/>
+              <a:t>1-1. 이 </a:t>
+            </a:r>
+            <a:r>
+              <a:rPr dirty="0" err="1"/>
+              <a:t>챗봇의</a:t>
+            </a:r>
+            <a:r>
+              <a:rPr dirty="0"/>
+              <a:t> </a:t>
+            </a:r>
+            <a:r>
+              <a:rPr dirty="0" err="1"/>
+              <a:t>목적</a:t>
+            </a:r>
+            <a:endParaRPr dirty="0"/>
+          </a:p>
+        </p:txBody>
+      </p:sp>
+      <p:sp>
+        <p:nvSpPr>
+          <p:cNvPr id="3" name="Rectangle 2"/>
+          <p:cNvSpPr/>
+          <p:nvPr/>
+        </p:nvSpPr>
+        <p:spPr>
+          <a:xfrm>
+            <a:off x="548640" y="1234440"/>
+            <a:ext cx="8229600" cy="45720"/>
+          </a:xfrm>
+          <a:prstGeom prst="rect">
+            <a:avLst/>
+          </a:prstGeom>
+          <a:solidFill>
+            <a:srgbClr val="1F77B4"/>
+          </a:solidFill>
+          <a:ln>
+            <a:noFill/>
+          </a:ln>
+        </p:spPr>
+        <p:style>
+          <a:lnRef idx="1">
+            <a:schemeClr val="accent1"/>
+          </a:lnRef>
+          <a:fillRef idx="3">
+            <a:schemeClr val="accent1"/>
+          </a:fillRef>
+          <a:effectRef idx="2">
+            <a:schemeClr val="accent1"/>
+          </a:effectRef>
+          <a:fontRef idx="minor">
+            <a:schemeClr val="lt1"/>
+          </a:fontRef>
+        </p:style>
+        <p:txBody>
+          <a:bodyPr rtlCol="0" anchor="ctr"/>
+          <a:lstStyle/>
+          <a:p>
+            <a:pPr algn="ctr"/>
+            <a:endParaRPr/>
+          </a:p>
+        </p:txBody>
+      </p:sp>
+      <p:pic>
+        <p:nvPicPr>
+          <p:cNvPr id="6" name="그림 5">
+            <a:extLst>
+              <a:ext uri="{FF2B5EF4-FFF2-40B4-BE49-F238E27FC236}">
+                <a16:creationId xmlns:a16="http://schemas.microsoft.com/office/drawing/2014/main" id="{4E1B900F-FC8E-4527-D595-A66603C71DB7}"/>
+              </a:ext>
+            </a:extLst>
+          </p:cNvPr>
+          <p:cNvPicPr>
+            <a:picLocks noChangeAspect="1"/>
+          </p:cNvPicPr>
+          <p:nvPr/>
+        </p:nvPicPr>
+        <p:blipFill>
+          <a:blip r:embed="rId2"/>
+          <a:stretch>
+            <a:fillRect/>
+          </a:stretch>
+        </p:blipFill>
+        <p:spPr>
+          <a:xfrm>
+            <a:off x="1669042" y="1417638"/>
+            <a:ext cx="5805915" cy="5152516"/>
+          </a:xfrm>
+          <a:prstGeom prst="rect">
+            <a:avLst/>
+          </a:prstGeom>
+        </p:spPr>
+      </p:pic>
+    </p:spTree>
+  </p:cSld>
+  <p:clrMapOvr>
+    <a:masterClrMapping/>
+  </p:clrMapOvr>
+</p:sld>
+</file>
+
+<file path=ppt/slides/slide5.xml><?xml version="1.0" encoding="utf-8"?>
+<p:sld xmlns:a="http://schemas.openxmlformats.org/drawingml/2006/main" xmlns:r="http://schemas.openxmlformats.org/officeDocument/2006/relationships" xmlns:p="http://schemas.openxmlformats.org/presentationml/2006/main">
+  <p:cSld>
+    <p:spTree>
+      <p:nvGrpSpPr>
+        <p:cNvPr id="1" name=""/>
+        <p:cNvGrpSpPr/>
+        <p:nvPr/>
+      </p:nvGrpSpPr>
+      <p:grpSpPr>
+        <a:xfrm>
+          <a:off x="0" y="0"/>
+          <a:ext cx="0" cy="0"/>
+          <a:chOff x="0" y="0"/>
+          <a:chExt cx="0" cy="0"/>
+        </a:xfrm>
+      </p:grpSpPr>
+      <p:sp>
+        <p:nvSpPr>
+          <p:cNvPr id="2" name="Title 1"/>
+          <p:cNvSpPr>
+            <a:spLocks noGrp="1"/>
+          </p:cNvSpPr>
+          <p:nvPr>
+            <p:ph type="title"/>
+          </p:nvPr>
+        </p:nvSpPr>
+        <p:spPr/>
+        <p:txBody>
+          <a:bodyPr/>
+          <a:lstStyle/>
+          <a:p>
+            <a:pPr>
+              <a:defRPr sz="2800" b="1">
+                <a:solidFill>
+                  <a:srgbClr val="142A4F"/>
+                </a:solidFill>
+              </a:defRPr>
+            </a:pPr>
+            <a:r>
+              <a:rPr dirty="0"/>
+              <a:t>1-1. 이 </a:t>
+            </a:r>
+            <a:r>
+              <a:rPr dirty="0" err="1"/>
+              <a:t>챗봇의</a:t>
+            </a:r>
+            <a:r>
+              <a:rPr dirty="0"/>
+              <a:t> </a:t>
+            </a:r>
+            <a:r>
+              <a:rPr dirty="0" err="1"/>
+              <a:t>목적</a:t>
+            </a:r>
+            <a:endParaRPr dirty="0"/>
+          </a:p>
+        </p:txBody>
+      </p:sp>
+      <p:sp>
+        <p:nvSpPr>
+          <p:cNvPr id="3" name="Rectangle 2"/>
+          <p:cNvSpPr/>
+          <p:nvPr/>
+        </p:nvSpPr>
+        <p:spPr>
+          <a:xfrm>
+            <a:off x="548640" y="1234440"/>
+            <a:ext cx="8229600" cy="45720"/>
+          </a:xfrm>
+          <a:prstGeom prst="rect">
+            <a:avLst/>
+          </a:prstGeom>
+          <a:solidFill>
+            <a:srgbClr val="1F77B4"/>
+          </a:solidFill>
+          <a:ln>
+            <a:noFill/>
+          </a:ln>
+        </p:spPr>
+        <p:style>
+          <a:lnRef idx="1">
+            <a:schemeClr val="accent1"/>
+          </a:lnRef>
+          <a:fillRef idx="3">
+            <a:schemeClr val="accent1"/>
+          </a:fillRef>
+          <a:effectRef idx="2">
+            <a:schemeClr val="accent1"/>
+          </a:effectRef>
+          <a:fontRef idx="minor">
+            <a:schemeClr val="lt1"/>
+          </a:fontRef>
+        </p:style>
+        <p:txBody>
+          <a:bodyPr rtlCol="0" anchor="ctr"/>
+          <a:lstStyle/>
+          <a:p>
+            <a:pPr algn="ctr"/>
+            <a:endParaRPr/>
+          </a:p>
+        </p:txBody>
+      </p:sp>
       <p:sp>
         <p:nvSpPr>
           <p:cNvPr id="4" name="TextBox 3"/>
@@ -10977,8 +12660,8 @@
         </p:nvSpPr>
         <p:spPr>
           <a:xfrm>
-            <a:off x="640080" y="1554480"/>
-            <a:ext cx="8138160" cy="3496791"/>
+            <a:off x="640080" y="1360516"/>
+            <a:ext cx="8138160" cy="2093715"/>
           </a:xfrm>
           <a:prstGeom prst="rect">
             <a:avLst/>
@@ -11113,47 +12796,35 @@
               <a:t> </a:t>
             </a:r>
             <a:r>
-              <a:rPr dirty="0" err="1"/>
+              <a:rPr u="sng" dirty="0" err="1"/>
               <a:t>도로교통법</a:t>
             </a:r>
             <a:r>
-              <a:rPr dirty="0"/>
-              <a:t>(2026.7.1 </a:t>
-            </a:r>
-            <a:r>
-              <a:rPr dirty="0" err="1"/>
-              <a:t>시행</a:t>
-            </a:r>
-            <a:r>
-              <a:rPr dirty="0"/>
-              <a:t>, </a:t>
-            </a:r>
-            <a:r>
-              <a:rPr dirty="0" err="1"/>
-              <a:t>법률</a:t>
-            </a:r>
-            <a:r>
-              <a:rPr dirty="0"/>
-              <a:t> 제21246호) </a:t>
-            </a:r>
-            <a:r>
-              <a:rPr dirty="0" err="1"/>
-              <a:t>조문과</a:t>
-            </a:r>
-            <a:r>
-              <a:rPr dirty="0"/>
-              <a:t> </a:t>
-            </a:r>
-            <a:r>
-              <a:rPr dirty="0" err="1"/>
+              <a:rPr lang="en-US" u="sng" dirty="0"/>
+              <a:t> </a:t>
+            </a:r>
+            <a:r>
+              <a:rPr u="sng" dirty="0" err="1"/>
+              <a:t>조문</a:t>
+            </a:r>
+            <a:r>
+              <a:rPr dirty="0" err="1"/>
+              <a:t>과</a:t>
+            </a:r>
+            <a:r>
+              <a:rPr dirty="0"/>
+              <a:t> </a:t>
+            </a:r>
+            <a:r>
+              <a:rPr u="sng" dirty="0" err="1"/>
               <a:t>대법원</a:t>
             </a:r>
             <a:r>
-              <a:rPr dirty="0"/>
-              <a:t> </a:t>
-            </a:r>
-            <a:r>
-              <a:rPr dirty="0" err="1"/>
+              <a:rPr u="sng" dirty="0"/>
+              <a:t> </a:t>
+            </a:r>
+            <a:r>
+              <a:rPr u="sng" dirty="0" err="1"/>
               <a:t>판례</a:t>
             </a:r>
             <a:r>
@@ -11188,65 +12859,79 @@
                 </a:solidFill>
               </a:defRPr>
             </a:pPr>
-            <a:r>
-              <a:rPr dirty="0"/>
-              <a:t>    </a:t>
-            </a:r>
-            <a:r>
-              <a:rPr dirty="0" err="1"/>
-              <a:t>검색된</a:t>
-            </a:r>
-            <a:r>
-              <a:rPr dirty="0"/>
-              <a:t> </a:t>
-            </a:r>
-            <a:r>
-              <a:rPr dirty="0" err="1"/>
-              <a:t>근거만</a:t>
-            </a:r>
-            <a:r>
-              <a:rPr dirty="0"/>
-              <a:t> </a:t>
-            </a:r>
-            <a:r>
-              <a:rPr dirty="0" err="1"/>
-              <a:t>인용해</a:t>
-            </a:r>
-            <a:r>
-              <a:rPr dirty="0"/>
-              <a:t> </a:t>
-            </a:r>
-            <a:r>
-              <a:rPr dirty="0" err="1"/>
+            <a:endParaRPr sz="900" dirty="0"/>
+          </a:p>
+          <a:p>
+            <a:pPr>
+              <a:lnSpc>
+                <a:spcPct val="150000"/>
+              </a:lnSpc>
+              <a:spcAft>
+                <a:spcPts val="600"/>
+              </a:spcAft>
+              <a:defRPr sz="1700">
+                <a:solidFill>
+                  <a:srgbClr val="142A4F"/>
+                </a:solidFill>
+              </a:defRPr>
+            </a:pPr>
+            <a:r>
+              <a:rPr b="1" dirty="0"/>
+              <a:t>• </a:t>
+            </a:r>
+            <a:r>
+              <a:rPr b="1" dirty="0" err="1"/>
+              <a:t>일반</a:t>
+            </a:r>
+            <a:r>
+              <a:rPr b="1" dirty="0"/>
+              <a:t> </a:t>
+            </a:r>
+            <a:r>
+              <a:rPr b="1" dirty="0" err="1"/>
+              <a:t>사용자가</a:t>
+            </a:r>
+            <a:r>
+              <a:rPr b="1" dirty="0"/>
+              <a:t> </a:t>
+            </a:r>
+            <a:r>
+              <a:rPr b="1" dirty="0" err="1"/>
+              <a:t>이해할</a:t>
+            </a:r>
+            <a:r>
+              <a:rPr b="1" dirty="0"/>
+              <a:t> 수 </a:t>
+            </a:r>
+            <a:r>
+              <a:rPr b="1" dirty="0" err="1"/>
+              <a:t>있는</a:t>
+            </a:r>
+            <a:r>
+              <a:rPr b="1" dirty="0"/>
+              <a:t> </a:t>
+            </a:r>
+            <a:r>
+              <a:rPr b="1" dirty="0" err="1"/>
+              <a:t>상담형</a:t>
+            </a:r>
+            <a:r>
+              <a:rPr b="1" dirty="0"/>
+              <a:t> </a:t>
+            </a:r>
+            <a:r>
+              <a:rPr b="1" dirty="0" err="1"/>
               <a:t>답변</a:t>
             </a:r>
             <a:r>
-              <a:rPr dirty="0"/>
-              <a:t> </a:t>
-            </a:r>
-            <a:r>
-              <a:rPr lang="en-US" altLang="ko-KR" dirty="0">
-                <a:sym typeface="Wingdings" panose="05000000000000000000" pitchFamily="2" charset="2"/>
-              </a:rPr>
-              <a:t></a:t>
-            </a:r>
-            <a:r>
-              <a:rPr dirty="0"/>
-              <a:t> </a:t>
-            </a:r>
-            <a:r>
-              <a:rPr dirty="0" err="1"/>
-              <a:t>환각</a:t>
-            </a:r>
-            <a:r>
-              <a:rPr dirty="0"/>
-              <a:t>(hallucination) </a:t>
-            </a:r>
-            <a:r>
-              <a:rPr dirty="0" err="1"/>
-              <a:t>최소화</a:t>
-            </a:r>
-            <a:endParaRPr lang="en-US" dirty="0"/>
+              <a:rPr b="1" dirty="0"/>
+              <a:t> </a:t>
+            </a:r>
+            <a:r>
+              <a:rPr b="1" dirty="0" err="1"/>
+              <a:t>제공</a:t>
+            </a:r>
+            <a:endParaRPr b="1" dirty="0"/>
           </a:p>
           <a:p>
             <a:pPr>
@@ -11262,94 +12947,6 @@
                 </a:solidFill>
               </a:defRPr>
             </a:pPr>
-            <a:endParaRPr dirty="0"/>
-          </a:p>
-          <a:p>
-            <a:pPr>
-              <a:lnSpc>
-                <a:spcPct val="150000"/>
-              </a:lnSpc>
-              <a:spcAft>
-                <a:spcPts val="600"/>
-              </a:spcAft>
-              <a:defRPr sz="1700">
-                <a:solidFill>
-                  <a:srgbClr val="142A4F"/>
-                </a:solidFill>
-              </a:defRPr>
-            </a:pPr>
-            <a:r>
-              <a:rPr b="1" dirty="0"/>
-              <a:t>• </a:t>
-            </a:r>
-            <a:r>
-              <a:rPr b="1" dirty="0" err="1"/>
-              <a:t>일반</a:t>
-            </a:r>
-            <a:r>
-              <a:rPr b="1" dirty="0"/>
-              <a:t> </a:t>
-            </a:r>
-            <a:r>
-              <a:rPr b="1" dirty="0" err="1"/>
-              <a:t>사용자가</a:t>
-            </a:r>
-            <a:r>
-              <a:rPr b="1" dirty="0"/>
-              <a:t> </a:t>
-            </a:r>
-            <a:r>
-              <a:rPr b="1" dirty="0" err="1"/>
-              <a:t>이해할</a:t>
-            </a:r>
-            <a:r>
-              <a:rPr b="1" dirty="0"/>
-              <a:t> 수 </a:t>
-            </a:r>
-            <a:r>
-              <a:rPr b="1" dirty="0" err="1"/>
-              <a:t>있는</a:t>
-            </a:r>
-            <a:r>
-              <a:rPr b="1" dirty="0"/>
-              <a:t> </a:t>
-            </a:r>
-            <a:r>
-              <a:rPr b="1" dirty="0" err="1"/>
-              <a:t>상담형</a:t>
-            </a:r>
-            <a:r>
-              <a:rPr b="1" dirty="0"/>
-              <a:t> </a:t>
-            </a:r>
-            <a:r>
-              <a:rPr b="1" dirty="0" err="1"/>
-              <a:t>답변</a:t>
-            </a:r>
-            <a:r>
-              <a:rPr b="1" dirty="0"/>
-              <a:t> </a:t>
-            </a:r>
-            <a:r>
-              <a:rPr b="1" dirty="0" err="1"/>
-              <a:t>제공</a:t>
-            </a:r>
-            <a:endParaRPr b="1" dirty="0"/>
-          </a:p>
-          <a:p>
-            <a:pPr>
-              <a:lnSpc>
-                <a:spcPct val="150000"/>
-              </a:lnSpc>
-              <a:spcAft>
-                <a:spcPts val="600"/>
-              </a:spcAft>
-              <a:defRPr sz="1500">
-                <a:solidFill>
-                  <a:srgbClr val="444444"/>
-                </a:solidFill>
-              </a:defRPr>
-            </a:pPr>
             <a:r>
               <a:rPr dirty="0"/>
               <a:t>    '</a:t>
@@ -11440,97 +13037,307 @@
             </a:r>
             <a:endParaRPr lang="en-US" dirty="0"/>
           </a:p>
-          <a:p>
-            <a:pPr>
-              <a:lnSpc>
-                <a:spcPct val="150000"/>
-              </a:lnSpc>
-              <a:spcAft>
-                <a:spcPts val="600"/>
-              </a:spcAft>
-              <a:defRPr sz="1500">
-                <a:solidFill>
-                  <a:srgbClr val="444444"/>
-                </a:solidFill>
-              </a:defRPr>
-            </a:pPr>
-            <a:endParaRPr dirty="0"/>
-          </a:p>
-          <a:p>
-            <a:pPr>
-              <a:lnSpc>
-                <a:spcPct val="150000"/>
-              </a:lnSpc>
-              <a:spcAft>
-                <a:spcPts val="600"/>
-              </a:spcAft>
-              <a:defRPr sz="1700">
-                <a:solidFill>
-                  <a:srgbClr val="142A4F"/>
-                </a:solidFill>
-              </a:defRPr>
-            </a:pPr>
-            <a:r>
-              <a:rPr b="1" dirty="0"/>
-              <a:t>• </a:t>
-            </a:r>
-            <a:r>
-              <a:rPr b="1" dirty="0" err="1"/>
-              <a:t>대상</a:t>
-            </a:r>
-            <a:r>
-              <a:rPr b="1" dirty="0"/>
-              <a:t>: </a:t>
-            </a:r>
-            <a:r>
-              <a:rPr b="1" dirty="0" err="1"/>
-              <a:t>법률</a:t>
-            </a:r>
-            <a:r>
-              <a:rPr b="1" dirty="0"/>
-              <a:t> </a:t>
-            </a:r>
-            <a:r>
-              <a:rPr b="1" dirty="0" err="1"/>
-              <a:t>비전문가</a:t>
-            </a:r>
-            <a:r>
-              <a:rPr b="1" dirty="0"/>
-              <a:t> </a:t>
-            </a:r>
-            <a:r>
-              <a:rPr b="1" dirty="0" err="1"/>
-              <a:t>사용자</a:t>
-            </a:r>
-            <a:r>
-              <a:rPr b="1" dirty="0"/>
-              <a:t> + Agentic RAG </a:t>
-            </a:r>
-            <a:r>
-              <a:rPr b="1" dirty="0" err="1"/>
-              <a:t>패턴을</a:t>
-            </a:r>
-            <a:r>
-              <a:rPr b="1" dirty="0"/>
-              <a:t> </a:t>
-            </a:r>
-            <a:r>
-              <a:rPr b="1" dirty="0" err="1"/>
-              <a:t>학습하려는</a:t>
-            </a:r>
-            <a:r>
-              <a:rPr b="1" dirty="0"/>
-              <a:t> </a:t>
-            </a:r>
-            <a:r>
-              <a:rPr b="1" dirty="0" err="1"/>
-              <a:t>개발자</a:t>
-            </a:r>
-            <a:endParaRPr b="1" dirty="0"/>
+        </p:txBody>
+      </p:sp>
+      <p:grpSp>
+        <p:nvGrpSpPr>
+          <p:cNvPr id="9" name="그룹 8">
+            <a:extLst>
+              <a:ext uri="{FF2B5EF4-FFF2-40B4-BE49-F238E27FC236}">
+                <a16:creationId xmlns:a16="http://schemas.microsoft.com/office/drawing/2014/main" id="{E960A58B-E246-17EF-96BE-CF80643CCC81}"/>
+              </a:ext>
+            </a:extLst>
+          </p:cNvPr>
+          <p:cNvGrpSpPr/>
+          <p:nvPr/>
+        </p:nvGrpSpPr>
+        <p:grpSpPr>
+          <a:xfrm>
+            <a:off x="120370" y="3565128"/>
+            <a:ext cx="8903260" cy="3027470"/>
+            <a:chOff x="-1095658" y="1750045"/>
+            <a:chExt cx="11391329" cy="3873515"/>
+          </a:xfrm>
+        </p:grpSpPr>
+        <p:pic>
+          <p:nvPicPr>
+            <p:cNvPr id="6" name="그림 5">
+              <a:extLst>
+                <a:ext uri="{FF2B5EF4-FFF2-40B4-BE49-F238E27FC236}">
+                  <a16:creationId xmlns:a16="http://schemas.microsoft.com/office/drawing/2014/main" id="{5BA4CDBC-DE49-0596-FF17-AA3592B0CD99}"/>
+                </a:ext>
+              </a:extLst>
+            </p:cNvPr>
+            <p:cNvPicPr>
+              <a:picLocks noChangeAspect="1"/>
+            </p:cNvPicPr>
+            <p:nvPr/>
+          </p:nvPicPr>
+          <p:blipFill>
+            <a:blip r:embed="rId2"/>
+            <a:stretch>
+              <a:fillRect/>
+            </a:stretch>
+          </p:blipFill>
+          <p:spPr>
+            <a:xfrm>
+              <a:off x="-1095658" y="1750045"/>
+              <a:ext cx="5747289" cy="3873515"/>
+            </a:xfrm>
+            <a:prstGeom prst="rect">
+              <a:avLst/>
+            </a:prstGeom>
+          </p:spPr>
+        </p:pic>
+        <p:pic>
+          <p:nvPicPr>
+            <p:cNvPr id="8" name="그림 7">
+              <a:extLst>
+                <a:ext uri="{FF2B5EF4-FFF2-40B4-BE49-F238E27FC236}">
+                  <a16:creationId xmlns:a16="http://schemas.microsoft.com/office/drawing/2014/main" id="{5CA6DDCE-CA15-944D-45C9-C21B7B7780EA}"/>
+                </a:ext>
+              </a:extLst>
+            </p:cNvPr>
+            <p:cNvPicPr>
+              <a:picLocks noChangeAspect="1"/>
+            </p:cNvPicPr>
+            <p:nvPr/>
+          </p:nvPicPr>
+          <p:blipFill>
+            <a:blip r:embed="rId3"/>
+            <a:stretch>
+              <a:fillRect/>
+            </a:stretch>
+          </p:blipFill>
+          <p:spPr>
+            <a:xfrm>
+              <a:off x="4572000" y="1813028"/>
+              <a:ext cx="5723671" cy="3810532"/>
+            </a:xfrm>
+            <a:prstGeom prst="rect">
+              <a:avLst/>
+            </a:prstGeom>
+          </p:spPr>
+        </p:pic>
+      </p:grpSp>
+      <p:sp>
+        <p:nvSpPr>
+          <p:cNvPr id="10" name="직사각형 9">
+            <a:extLst>
+              <a:ext uri="{FF2B5EF4-FFF2-40B4-BE49-F238E27FC236}">
+                <a16:creationId xmlns:a16="http://schemas.microsoft.com/office/drawing/2014/main" id="{D46BB5BB-EC28-91BB-D676-57D14B5B4C10}"/>
+              </a:ext>
+            </a:extLst>
+          </p:cNvPr>
+          <p:cNvSpPr/>
+          <p:nvPr/>
+        </p:nvSpPr>
+        <p:spPr>
+          <a:xfrm>
+            <a:off x="314037" y="3980872"/>
+            <a:ext cx="3722254" cy="591127"/>
+          </a:xfrm>
+          <a:prstGeom prst="rect">
+            <a:avLst/>
+          </a:prstGeom>
+          <a:noFill/>
+          <a:ln w="19050">
+            <a:solidFill>
+              <a:srgbClr val="FF0000">
+                <a:alpha val="62000"/>
+              </a:srgbClr>
+            </a:solidFill>
+            <a:prstDash val="dash"/>
+          </a:ln>
+        </p:spPr>
+        <p:style>
+          <a:lnRef idx="1">
+            <a:schemeClr val="accent1"/>
+          </a:lnRef>
+          <a:fillRef idx="3">
+            <a:schemeClr val="accent1"/>
+          </a:fillRef>
+          <a:effectRef idx="2">
+            <a:schemeClr val="accent1"/>
+          </a:effectRef>
+          <a:fontRef idx="minor">
+            <a:schemeClr val="lt1"/>
+          </a:fontRef>
+        </p:style>
+        <p:txBody>
+          <a:bodyPr rtlCol="0" anchor="ctr"/>
+          <a:lstStyle/>
+          <a:p>
+            <a:pPr algn="ctr"/>
+            <a:endParaRPr lang="ko-KR" altLang="en-US"/>
+          </a:p>
+        </p:txBody>
+      </p:sp>
+      <p:sp>
+        <p:nvSpPr>
+          <p:cNvPr id="11" name="직사각형 10">
+            <a:extLst>
+              <a:ext uri="{FF2B5EF4-FFF2-40B4-BE49-F238E27FC236}">
+                <a16:creationId xmlns:a16="http://schemas.microsoft.com/office/drawing/2014/main" id="{E3534890-0EAA-F4C8-9D9A-DC25AE8228FC}"/>
+              </a:ext>
+            </a:extLst>
+          </p:cNvPr>
+          <p:cNvSpPr/>
+          <p:nvPr/>
+        </p:nvSpPr>
+        <p:spPr>
+          <a:xfrm>
+            <a:off x="314037" y="4664363"/>
+            <a:ext cx="3722254" cy="1136073"/>
+          </a:xfrm>
+          <a:prstGeom prst="rect">
+            <a:avLst/>
+          </a:prstGeom>
+          <a:noFill/>
+          <a:ln w="19050">
+            <a:solidFill>
+              <a:srgbClr val="FF0000">
+                <a:alpha val="62000"/>
+              </a:srgbClr>
+            </a:solidFill>
+            <a:prstDash val="dash"/>
+          </a:ln>
+        </p:spPr>
+        <p:style>
+          <a:lnRef idx="1">
+            <a:schemeClr val="accent1"/>
+          </a:lnRef>
+          <a:fillRef idx="3">
+            <a:schemeClr val="accent1"/>
+          </a:fillRef>
+          <a:effectRef idx="2">
+            <a:schemeClr val="accent1"/>
+          </a:effectRef>
+          <a:fontRef idx="minor">
+            <a:schemeClr val="lt1"/>
+          </a:fontRef>
+        </p:style>
+        <p:txBody>
+          <a:bodyPr rtlCol="0" anchor="ctr"/>
+          <a:lstStyle/>
+          <a:p>
+            <a:pPr algn="ctr"/>
+            <a:endParaRPr lang="ko-KR" altLang="en-US"/>
+          </a:p>
+        </p:txBody>
+      </p:sp>
+      <p:sp>
+        <p:nvSpPr>
+          <p:cNvPr id="12" name="직사각형 11">
+            <a:extLst>
+              <a:ext uri="{FF2B5EF4-FFF2-40B4-BE49-F238E27FC236}">
+                <a16:creationId xmlns:a16="http://schemas.microsoft.com/office/drawing/2014/main" id="{0414BB07-021C-B094-B92F-6D898A656819}"/>
+              </a:ext>
+            </a:extLst>
+          </p:cNvPr>
+          <p:cNvSpPr/>
+          <p:nvPr/>
+        </p:nvSpPr>
+        <p:spPr>
+          <a:xfrm>
+            <a:off x="314037" y="5892799"/>
+            <a:ext cx="3722254" cy="766619"/>
+          </a:xfrm>
+          <a:prstGeom prst="rect">
+            <a:avLst/>
+          </a:prstGeom>
+          <a:noFill/>
+          <a:ln w="19050">
+            <a:solidFill>
+              <a:srgbClr val="FF0000">
+                <a:alpha val="62000"/>
+              </a:srgbClr>
+            </a:solidFill>
+            <a:prstDash val="dash"/>
+          </a:ln>
+        </p:spPr>
+        <p:style>
+          <a:lnRef idx="1">
+            <a:schemeClr val="accent1"/>
+          </a:lnRef>
+          <a:fillRef idx="3">
+            <a:schemeClr val="accent1"/>
+          </a:fillRef>
+          <a:effectRef idx="2">
+            <a:schemeClr val="accent1"/>
+          </a:effectRef>
+          <a:fontRef idx="minor">
+            <a:schemeClr val="lt1"/>
+          </a:fontRef>
+        </p:style>
+        <p:txBody>
+          <a:bodyPr rtlCol="0" anchor="ctr"/>
+          <a:lstStyle/>
+          <a:p>
+            <a:pPr algn="ctr"/>
+            <a:endParaRPr lang="ko-KR" altLang="en-US"/>
+          </a:p>
+        </p:txBody>
+      </p:sp>
+      <p:sp>
+        <p:nvSpPr>
+          <p:cNvPr id="13" name="직사각형 12">
+            <a:extLst>
+              <a:ext uri="{FF2B5EF4-FFF2-40B4-BE49-F238E27FC236}">
+                <a16:creationId xmlns:a16="http://schemas.microsoft.com/office/drawing/2014/main" id="{5AB395F8-6847-9671-CE13-8695EC226D20}"/>
+              </a:ext>
+            </a:extLst>
+          </p:cNvPr>
+          <p:cNvSpPr/>
+          <p:nvPr/>
+        </p:nvSpPr>
+        <p:spPr>
+          <a:xfrm>
+            <a:off x="4710546" y="3879272"/>
+            <a:ext cx="3722254" cy="988292"/>
+          </a:xfrm>
+          <a:prstGeom prst="rect">
+            <a:avLst/>
+          </a:prstGeom>
+          <a:noFill/>
+          <a:ln w="19050">
+            <a:solidFill>
+              <a:srgbClr val="FF0000">
+                <a:alpha val="62000"/>
+              </a:srgbClr>
+            </a:solidFill>
+            <a:prstDash val="dash"/>
+          </a:ln>
+        </p:spPr>
+        <p:style>
+          <a:lnRef idx="1">
+            <a:schemeClr val="accent1"/>
+          </a:lnRef>
+          <a:fillRef idx="3">
+            <a:schemeClr val="accent1"/>
+          </a:fillRef>
+          <a:effectRef idx="2">
+            <a:schemeClr val="accent1"/>
+          </a:effectRef>
+          <a:fontRef idx="minor">
+            <a:schemeClr val="lt1"/>
+          </a:fontRef>
+        </p:style>
+        <p:txBody>
+          <a:bodyPr rtlCol="0" anchor="ctr"/>
+          <a:lstStyle/>
+          <a:p>
+            <a:pPr algn="ctr"/>
+            <a:endParaRPr lang="ko-KR" altLang="en-US"/>
           </a:p>
         </p:txBody>
       </p:sp>
     </p:spTree>
+    <p:extLst>
+      <p:ext uri="{BB962C8B-B14F-4D97-AF65-F5344CB8AC3E}">
+        <p14:creationId xmlns:p14="http://schemas.microsoft.com/office/powerpoint/2010/main" val="3375537229"/>
+      </p:ext>
+    </p:extLst>
   </p:cSld>
   <p:clrMapOvr>
     <a:masterClrMapping/>
@@ -11538,7 +13345,7 @@
 </p:sld>
 </file>
 
-<file path=ppt/slides/slide5.xml><?xml version="1.0" encoding="utf-8"?>
+<file path=ppt/slides/slide6.xml><?xml version="1.0" encoding="utf-8"?>
 <p:sld xmlns:a="http://schemas.openxmlformats.org/drawingml/2006/main" xmlns:r="http://schemas.openxmlformats.org/officeDocument/2006/relationships" xmlns:p="http://schemas.openxmlformats.org/presentationml/2006/main">
   <p:cSld>
     <p:spTree>
@@ -12487,7 +14294,7 @@
 </p:sld>
 </file>
 
-<file path=ppt/slides/slide6.xml><?xml version="1.0" encoding="utf-8"?>
+<file path=ppt/slides/slide7.xml><?xml version="1.0" encoding="utf-8"?>
 <p:sld xmlns:a="http://schemas.openxmlformats.org/drawingml/2006/main" xmlns:r="http://schemas.openxmlformats.org/officeDocument/2006/relationships" xmlns:p="http://schemas.openxmlformats.org/presentationml/2006/main">
   <p:cSld>
     <p:spTree>
@@ -12931,10 +14738,14 @@
             </a:r>
             <a:r>
               <a:rPr lang="en-US" altLang="ko-KR" dirty="0"/>
-              <a:t>-. Golden Datas</a:t>
-            </a:r>
-            <a:r>
-              <a:rPr dirty="0"/>
+              <a:t>-. </a:t>
+            </a:r>
+            <a:r>
+              <a:rPr lang="en-US" altLang="ko-KR" b="1" dirty="0"/>
+              <a:t>Golden Datas</a:t>
+            </a:r>
+            <a:r>
+              <a:rPr b="1" dirty="0"/>
               <a:t>et</a:t>
             </a:r>
             <a:r>
@@ -13245,7 +15056,7 @@
 </p:sld>
 </file>
 
-<file path=ppt/slides/slide7.xml><?xml version="1.0" encoding="utf-8"?>
+<file path=ppt/slides/slide8.xml><?xml version="1.0" encoding="utf-8"?>
 <p:sld xmlns:a="http://schemas.openxmlformats.org/drawingml/2006/main" xmlns:r="http://schemas.openxmlformats.org/officeDocument/2006/relationships" xmlns:p="http://schemas.openxmlformats.org/presentationml/2006/main">
   <p:cSld>
     <p:bg>
@@ -13353,7 +15164,7 @@
 </p:sld>
 </file>
 
-<file path=ppt/slides/slide8.xml><?xml version="1.0" encoding="utf-8"?>
+<file path=ppt/slides/slide9.xml><?xml version="1.0" encoding="utf-8"?>
 <p:sld xmlns:a="http://schemas.openxmlformats.org/drawingml/2006/main" xmlns:r="http://schemas.openxmlformats.org/officeDocument/2006/relationships" xmlns:p="http://schemas.openxmlformats.org/presentationml/2006/main">
   <p:cSld>
     <p:spTree>
@@ -14079,283 +15890,6 @@
         </p:txBody>
       </p:sp>
     </p:spTree>
-  </p:cSld>
-  <p:clrMapOvr>
-    <a:masterClrMapping/>
-  </p:clrMapOvr>
-</p:sld>
-</file>
-
-<file path=ppt/slides/slide9.xml><?xml version="1.0" encoding="utf-8"?>
-<p:sld xmlns:a="http://schemas.openxmlformats.org/drawingml/2006/main" xmlns:r="http://schemas.openxmlformats.org/officeDocument/2006/relationships" xmlns:p="http://schemas.openxmlformats.org/presentationml/2006/main">
-  <p:cSld>
-    <p:spTree>
-      <p:nvGrpSpPr>
-        <p:cNvPr id="1" name="">
-          <a:extLst>
-            <a:ext uri="{FF2B5EF4-FFF2-40B4-BE49-F238E27FC236}">
-              <a16:creationId xmlns:a16="http://schemas.microsoft.com/office/drawing/2014/main" id="{9576EEA4-EFFE-44F0-46A1-4B8A11BA8675}"/>
-            </a:ext>
-          </a:extLst>
-        </p:cNvPr>
-        <p:cNvGrpSpPr/>
-        <p:nvPr/>
-      </p:nvGrpSpPr>
-      <p:grpSpPr>
-        <a:xfrm>
-          <a:off x="0" y="0"/>
-          <a:ext cx="0" cy="0"/>
-          <a:chOff x="0" y="0"/>
-          <a:chExt cx="0" cy="0"/>
-        </a:xfrm>
-      </p:grpSpPr>
-      <p:sp>
-        <p:nvSpPr>
-          <p:cNvPr id="2" name="Title 1">
-            <a:extLst>
-              <a:ext uri="{FF2B5EF4-FFF2-40B4-BE49-F238E27FC236}">
-                <a16:creationId xmlns:a16="http://schemas.microsoft.com/office/drawing/2014/main" id="{D4D8A8AA-4C74-FA87-DEC2-7399FAFAC5DB}"/>
-              </a:ext>
-            </a:extLst>
-          </p:cNvPr>
-          <p:cNvSpPr>
-            <a:spLocks noGrp="1"/>
-          </p:cNvSpPr>
-          <p:nvPr>
-            <p:ph type="title"/>
-          </p:nvPr>
-        </p:nvSpPr>
-        <p:spPr/>
-        <p:txBody>
-          <a:bodyPr/>
-          <a:lstStyle/>
-          <a:p>
-            <a:pPr>
-              <a:defRPr sz="2800" b="1">
-                <a:solidFill>
-                  <a:srgbClr val="142A4F"/>
-                </a:solidFill>
-              </a:defRPr>
-            </a:pPr>
-            <a:r>
-              <a:t>2-1. LLM 모델 &amp; 프레임워크</a:t>
-            </a:r>
-          </a:p>
-        </p:txBody>
-      </p:sp>
-      <p:sp>
-        <p:nvSpPr>
-          <p:cNvPr id="3" name="Rectangle 2">
-            <a:extLst>
-              <a:ext uri="{FF2B5EF4-FFF2-40B4-BE49-F238E27FC236}">
-                <a16:creationId xmlns:a16="http://schemas.microsoft.com/office/drawing/2014/main" id="{861579AE-BD41-CED5-996D-A1502F1D2197}"/>
-              </a:ext>
-            </a:extLst>
-          </p:cNvPr>
-          <p:cNvSpPr/>
-          <p:nvPr/>
-        </p:nvSpPr>
-        <p:spPr>
-          <a:xfrm>
-            <a:off x="548640" y="1234440"/>
-            <a:ext cx="8229600" cy="45720"/>
-          </a:xfrm>
-          <a:prstGeom prst="rect">
-            <a:avLst/>
-          </a:prstGeom>
-          <a:solidFill>
-            <a:srgbClr val="1F77B4"/>
-          </a:solidFill>
-          <a:ln>
-            <a:noFill/>
-          </a:ln>
-        </p:spPr>
-        <p:style>
-          <a:lnRef idx="1">
-            <a:schemeClr val="accent1"/>
-          </a:lnRef>
-          <a:fillRef idx="3">
-            <a:schemeClr val="accent1"/>
-          </a:fillRef>
-          <a:effectRef idx="2">
-            <a:schemeClr val="accent1"/>
-          </a:effectRef>
-          <a:fontRef idx="minor">
-            <a:schemeClr val="lt1"/>
-          </a:fontRef>
-        </p:style>
-        <p:txBody>
-          <a:bodyPr rtlCol="0" anchor="ctr"/>
-          <a:lstStyle/>
-          <a:p>
-            <a:pPr algn="ctr"/>
-            <a:endParaRPr/>
-          </a:p>
-        </p:txBody>
-      </p:sp>
-      <p:sp>
-        <p:nvSpPr>
-          <p:cNvPr id="4" name="TextBox 3">
-            <a:extLst>
-              <a:ext uri="{FF2B5EF4-FFF2-40B4-BE49-F238E27FC236}">
-                <a16:creationId xmlns:a16="http://schemas.microsoft.com/office/drawing/2014/main" id="{5386EAC1-F33A-5637-974D-81EE055B7271}"/>
-              </a:ext>
-            </a:extLst>
-          </p:cNvPr>
-          <p:cNvSpPr txBox="1"/>
-          <p:nvPr/>
-        </p:nvSpPr>
-        <p:spPr>
-          <a:xfrm>
-            <a:off x="640080" y="1554480"/>
-            <a:ext cx="8138160" cy="423449"/>
-          </a:xfrm>
-          <a:prstGeom prst="rect">
-            <a:avLst/>
-          </a:prstGeom>
-          <a:noFill/>
-        </p:spPr>
-        <p:txBody>
-          <a:bodyPr wrap="square">
-            <a:spAutoFit/>
-          </a:bodyPr>
-          <a:lstStyle/>
-          <a:p>
-            <a:pPr>
-              <a:lnSpc>
-                <a:spcPct val="150000"/>
-              </a:lnSpc>
-              <a:spcAft>
-                <a:spcPts val="600"/>
-              </a:spcAft>
-              <a:defRPr sz="1600">
-                <a:solidFill>
-                  <a:srgbClr val="142A4F"/>
-                </a:solidFill>
-              </a:defRPr>
-            </a:pPr>
-            <a:r>
-              <a:rPr b="1" dirty="0"/>
-              <a:t>• </a:t>
-            </a:r>
-            <a:r>
-              <a:rPr lang="ko-KR" altLang="en-US" b="1" dirty="0"/>
-              <a:t>도로교통법</a:t>
-            </a:r>
-            <a:r>
-              <a:rPr lang="en-US" altLang="ko-KR" b="1" dirty="0"/>
-              <a:t>_</a:t>
-            </a:r>
-            <a:r>
-              <a:rPr lang="ko-KR" altLang="en-US" b="1" dirty="0"/>
-              <a:t>법률</a:t>
-            </a:r>
-            <a:r>
-              <a:rPr lang="en-US" altLang="ko-KR" b="1" dirty="0"/>
-              <a:t>_</a:t>
-            </a:r>
-            <a:r>
-              <a:rPr lang="ko-KR" altLang="en-US" b="1" dirty="0"/>
-              <a:t>제</a:t>
-            </a:r>
-            <a:r>
-              <a:rPr lang="en-US" altLang="ko-KR" b="1" dirty="0"/>
-              <a:t>21246</a:t>
-            </a:r>
-            <a:r>
-              <a:rPr lang="ko-KR" altLang="en-US" b="1" dirty="0"/>
-              <a:t>호</a:t>
-            </a:r>
-            <a:r>
-              <a:rPr lang="en-US" altLang="ko-KR" b="1" dirty="0"/>
-              <a:t>.pdf</a:t>
-            </a:r>
-            <a:r>
-              <a:rPr lang="ko-KR" altLang="en-US" b="1" dirty="0"/>
-              <a:t> </a:t>
-            </a:r>
-            <a:r>
-              <a:rPr lang="en-US" altLang="ko-KR" b="1" dirty="0"/>
-              <a:t>/ </a:t>
-            </a:r>
-            <a:r>
-              <a:rPr lang="ko-KR" altLang="en-US" b="1" dirty="0"/>
-              <a:t>판례목록</a:t>
-            </a:r>
-            <a:r>
-              <a:rPr lang="en-US" altLang="ko-KR" b="1" dirty="0"/>
-              <a:t>.csv</a:t>
-            </a:r>
-            <a:endParaRPr b="1" dirty="0"/>
-          </a:p>
-        </p:txBody>
-      </p:sp>
-      <p:pic>
-        <p:nvPicPr>
-          <p:cNvPr id="6" name="그림 5">
-            <a:extLst>
-              <a:ext uri="{FF2B5EF4-FFF2-40B4-BE49-F238E27FC236}">
-                <a16:creationId xmlns:a16="http://schemas.microsoft.com/office/drawing/2014/main" id="{E36C1A9E-F5C8-CACB-648D-B5F6BFEF8A24}"/>
-              </a:ext>
-            </a:extLst>
-          </p:cNvPr>
-          <p:cNvPicPr>
-            <a:picLocks noChangeAspect="1"/>
-          </p:cNvPicPr>
-          <p:nvPr/>
-        </p:nvPicPr>
-        <p:blipFill>
-          <a:blip r:embed="rId2"/>
-          <a:stretch>
-            <a:fillRect/>
-          </a:stretch>
-        </p:blipFill>
-        <p:spPr>
-          <a:xfrm>
-            <a:off x="217696" y="2252249"/>
-            <a:ext cx="4527741" cy="3812551"/>
-          </a:xfrm>
-          <a:prstGeom prst="rect">
-            <a:avLst/>
-          </a:prstGeom>
-        </p:spPr>
-      </p:pic>
-      <p:pic>
-        <p:nvPicPr>
-          <p:cNvPr id="8" name="그림 7">
-            <a:extLst>
-              <a:ext uri="{FF2B5EF4-FFF2-40B4-BE49-F238E27FC236}">
-                <a16:creationId xmlns:a16="http://schemas.microsoft.com/office/drawing/2014/main" id="{9AD8F78D-802F-BD09-588D-09909EA4A930}"/>
-              </a:ext>
-            </a:extLst>
-          </p:cNvPr>
-          <p:cNvPicPr>
-            <a:picLocks noChangeAspect="1"/>
-          </p:cNvPicPr>
-          <p:nvPr/>
-        </p:nvPicPr>
-        <p:blipFill>
-          <a:blip r:embed="rId3"/>
-          <a:stretch>
-            <a:fillRect/>
-          </a:stretch>
-        </p:blipFill>
-        <p:spPr>
-          <a:xfrm>
-            <a:off x="4918407" y="2384401"/>
-            <a:ext cx="4016851" cy="3871161"/>
-          </a:xfrm>
-          <a:prstGeom prst="rect">
-            <a:avLst/>
-          </a:prstGeom>
-        </p:spPr>
-      </p:pic>
-    </p:spTree>
-    <p:extLst>
-      <p:ext uri="{BB962C8B-B14F-4D97-AF65-F5344CB8AC3E}">
-        <p14:creationId xmlns:p14="http://schemas.microsoft.com/office/powerpoint/2010/main" val="2777759217"/>
-      </p:ext>
-    </p:extLst>
   </p:cSld>
   <p:clrMapOvr>
     <a:masterClrMapping/>
